--- a/exports/pptx/lessons/primary-module-11-multiplication-near-base/day-03-finger-trick.pptx
+++ b/exports/pptx/lessons/primary-module-11-multiplication-near-base/day-03-finger-trick.pptx
@@ -15,9 +15,15 @@
     <p:sldId id="263" r:id="rId9"/>
     <p:sldId id="264" r:id="rId10"/>
     <p:sldId id="265" r:id="rId11"/>
+    <p:sldId id="266" r:id="rId12"/>
+    <p:sldId id="267" r:id="rId13"/>
+    <p:sldId id="268" r:id="rId14"/>
+    <p:sldId id="269" r:id="rId15"/>
+    <p:sldId id="270" r:id="rId16"/>
+    <p:sldId id="271" r:id="rId17"/>
   </p:sldIdLst>
   <p:notesMasterIdLst>
-    <p:notesMasterId r:id="rId12"/>
+    <p:notesMasterId r:id="rId18"/>
   </p:notesMasterIdLst>
   <p:sldSz cx="9144000" cy="5143500"/>
   <p:notesSz cx="5143500" cy="9144000"/>
@@ -623,6 +629,534 @@
             <a:fld id="{F7021451-1387-4CA6-816F-3879F97B5CBC}" type="slidenum">
               <a:rPr lang="en-US"/>
               <a:t>10</a:t>
+            </a:fld>
+            <a:endParaRPr lang="en-US"/>
+          </a:p>
+        </p:txBody>
+      </p:sp>
+    </p:spTree>
+    <p:extLst>
+      <p:ext uri="{BB962C8B-B14F-4D97-AF65-F5344CB8AC3E}">
+        <p14:creationId xmlns:p14="http://schemas.microsoft.com/office/powerpoint/2010/main" val="1024086991"/>
+      </p:ext>
+    </p:extLst>
+  </p:cSld>
+  <p:clrMapOvr>
+    <a:masterClrMapping/>
+  </p:clrMapOvr>
+</p:notes>
+</file>
+
+<file path=ppt/notesSlides/notesSlide11.xml><?xml version="1.0" encoding="utf-8"?>
+<p:notes xmlns:a="http://schemas.openxmlformats.org/drawingml/2006/main" xmlns:r="http://schemas.openxmlformats.org/officeDocument/2006/relationships" xmlns:p="http://schemas.openxmlformats.org/presentationml/2006/main">
+  <p:cSld>
+    <p:spTree>
+      <p:nvGrpSpPr>
+        <p:cNvPr id="1" name=""/>
+        <p:cNvGrpSpPr/>
+        <p:nvPr/>
+      </p:nvGrpSpPr>
+      <p:grpSpPr>
+        <a:xfrm>
+          <a:off x="0" y="0"/>
+          <a:ext cx="0" cy="0"/>
+          <a:chOff x="0" y="0"/>
+          <a:chExt cx="0" cy="0"/>
+        </a:xfrm>
+      </p:grpSpPr>
+      <p:sp>
+        <p:nvSpPr>
+          <p:cNvPr id="2" name="Slide Image Placeholder 1"/>
+          <p:cNvSpPr>
+            <a:spLocks noGrp="1" noRot="1" noChangeAspect="1"/>
+          </p:cNvSpPr>
+          <p:nvPr>
+            <p:ph type="sldImg"/>
+          </p:nvPr>
+        </p:nvSpPr>
+        <p:spPr/>
+      </p:sp>
+      <p:sp>
+        <p:nvSpPr>
+          <p:cNvPr id="3" name="Notes Placeholder 2"/>
+          <p:cNvSpPr>
+            <a:spLocks noGrp="1"/>
+          </p:cNvSpPr>
+          <p:nvPr>
+            <p:ph type="body" idx="1"/>
+          </p:nvPr>
+        </p:nvSpPr>
+        <p:spPr/>
+        <p:txBody>
+          <a:bodyPr/>
+          <a:lstStyle/>
+          <a:p>
+            <a:r>
+              <a:rPr lang="en-US" dirty="0"/>
+              <a:t/>
+            </a:r>
+            <a:endParaRPr lang="en-US" dirty="0"/>
+          </a:p>
+        </p:txBody>
+      </p:sp>
+      <p:sp>
+        <p:nvSpPr>
+          <p:cNvPr id="4" name="Slide Number Placeholder 3"/>
+          <p:cNvSpPr>
+            <a:spLocks noGrp="1"/>
+          </p:cNvSpPr>
+          <p:nvPr>
+            <p:ph type="sldNum" sz="quarter" idx="10"/>
+          </p:nvPr>
+        </p:nvSpPr>
+        <p:spPr/>
+        <p:txBody>
+          <a:bodyPr/>
+          <a:lstStyle/>
+          <a:p>
+            <a:fld id="{F7021451-1387-4CA6-816F-3879F97B5CBC}" type="slidenum">
+              <a:rPr lang="en-US"/>
+              <a:t>11</a:t>
+            </a:fld>
+            <a:endParaRPr lang="en-US"/>
+          </a:p>
+        </p:txBody>
+      </p:sp>
+    </p:spTree>
+    <p:extLst>
+      <p:ext uri="{BB962C8B-B14F-4D97-AF65-F5344CB8AC3E}">
+        <p14:creationId xmlns:p14="http://schemas.microsoft.com/office/powerpoint/2010/main" val="1024086991"/>
+      </p:ext>
+    </p:extLst>
+  </p:cSld>
+  <p:clrMapOvr>
+    <a:masterClrMapping/>
+  </p:clrMapOvr>
+</p:notes>
+</file>
+
+<file path=ppt/notesSlides/notesSlide12.xml><?xml version="1.0" encoding="utf-8"?>
+<p:notes xmlns:a="http://schemas.openxmlformats.org/drawingml/2006/main" xmlns:r="http://schemas.openxmlformats.org/officeDocument/2006/relationships" xmlns:p="http://schemas.openxmlformats.org/presentationml/2006/main">
+  <p:cSld>
+    <p:spTree>
+      <p:nvGrpSpPr>
+        <p:cNvPr id="1" name=""/>
+        <p:cNvGrpSpPr/>
+        <p:nvPr/>
+      </p:nvGrpSpPr>
+      <p:grpSpPr>
+        <a:xfrm>
+          <a:off x="0" y="0"/>
+          <a:ext cx="0" cy="0"/>
+          <a:chOff x="0" y="0"/>
+          <a:chExt cx="0" cy="0"/>
+        </a:xfrm>
+      </p:grpSpPr>
+      <p:sp>
+        <p:nvSpPr>
+          <p:cNvPr id="2" name="Slide Image Placeholder 1"/>
+          <p:cNvSpPr>
+            <a:spLocks noGrp="1" noRot="1" noChangeAspect="1"/>
+          </p:cNvSpPr>
+          <p:nvPr>
+            <p:ph type="sldImg"/>
+          </p:nvPr>
+        </p:nvSpPr>
+        <p:spPr/>
+      </p:sp>
+      <p:sp>
+        <p:nvSpPr>
+          <p:cNvPr id="3" name="Notes Placeholder 2"/>
+          <p:cNvSpPr>
+            <a:spLocks noGrp="1"/>
+          </p:cNvSpPr>
+          <p:nvPr>
+            <p:ph type="body" idx="1"/>
+          </p:nvPr>
+        </p:nvSpPr>
+        <p:spPr/>
+        <p:txBody>
+          <a:bodyPr/>
+          <a:lstStyle/>
+          <a:p>
+            <a:r>
+              <a:rPr lang="en-US" dirty="0"/>
+              <a:t/>
+            </a:r>
+            <a:endParaRPr lang="en-US" dirty="0"/>
+          </a:p>
+        </p:txBody>
+      </p:sp>
+      <p:sp>
+        <p:nvSpPr>
+          <p:cNvPr id="4" name="Slide Number Placeholder 3"/>
+          <p:cNvSpPr>
+            <a:spLocks noGrp="1"/>
+          </p:cNvSpPr>
+          <p:nvPr>
+            <p:ph type="sldNum" sz="quarter" idx="10"/>
+          </p:nvPr>
+        </p:nvSpPr>
+        <p:spPr/>
+        <p:txBody>
+          <a:bodyPr/>
+          <a:lstStyle/>
+          <a:p>
+            <a:fld id="{F7021451-1387-4CA6-816F-3879F97B5CBC}" type="slidenum">
+              <a:rPr lang="en-US"/>
+              <a:t>12</a:t>
+            </a:fld>
+            <a:endParaRPr lang="en-US"/>
+          </a:p>
+        </p:txBody>
+      </p:sp>
+    </p:spTree>
+    <p:extLst>
+      <p:ext uri="{BB962C8B-B14F-4D97-AF65-F5344CB8AC3E}">
+        <p14:creationId xmlns:p14="http://schemas.microsoft.com/office/powerpoint/2010/main" val="1024086991"/>
+      </p:ext>
+    </p:extLst>
+  </p:cSld>
+  <p:clrMapOvr>
+    <a:masterClrMapping/>
+  </p:clrMapOvr>
+</p:notes>
+</file>
+
+<file path=ppt/notesSlides/notesSlide13.xml><?xml version="1.0" encoding="utf-8"?>
+<p:notes xmlns:a="http://schemas.openxmlformats.org/drawingml/2006/main" xmlns:r="http://schemas.openxmlformats.org/officeDocument/2006/relationships" xmlns:p="http://schemas.openxmlformats.org/presentationml/2006/main">
+  <p:cSld>
+    <p:spTree>
+      <p:nvGrpSpPr>
+        <p:cNvPr id="1" name=""/>
+        <p:cNvGrpSpPr/>
+        <p:nvPr/>
+      </p:nvGrpSpPr>
+      <p:grpSpPr>
+        <a:xfrm>
+          <a:off x="0" y="0"/>
+          <a:ext cx="0" cy="0"/>
+          <a:chOff x="0" y="0"/>
+          <a:chExt cx="0" cy="0"/>
+        </a:xfrm>
+      </p:grpSpPr>
+      <p:sp>
+        <p:nvSpPr>
+          <p:cNvPr id="2" name="Slide Image Placeholder 1"/>
+          <p:cNvSpPr>
+            <a:spLocks noGrp="1" noRot="1" noChangeAspect="1"/>
+          </p:cNvSpPr>
+          <p:nvPr>
+            <p:ph type="sldImg"/>
+          </p:nvPr>
+        </p:nvSpPr>
+        <p:spPr/>
+      </p:sp>
+      <p:sp>
+        <p:nvSpPr>
+          <p:cNvPr id="3" name="Notes Placeholder 2"/>
+          <p:cNvSpPr>
+            <a:spLocks noGrp="1"/>
+          </p:cNvSpPr>
+          <p:nvPr>
+            <p:ph type="body" idx="1"/>
+          </p:nvPr>
+        </p:nvSpPr>
+        <p:spPr/>
+        <p:txBody>
+          <a:bodyPr/>
+          <a:lstStyle/>
+          <a:p>
+            <a:r>
+              <a:rPr lang="en-US" dirty="0"/>
+              <a:t/>
+            </a:r>
+            <a:endParaRPr lang="en-US" dirty="0"/>
+          </a:p>
+        </p:txBody>
+      </p:sp>
+      <p:sp>
+        <p:nvSpPr>
+          <p:cNvPr id="4" name="Slide Number Placeholder 3"/>
+          <p:cNvSpPr>
+            <a:spLocks noGrp="1"/>
+          </p:cNvSpPr>
+          <p:nvPr>
+            <p:ph type="sldNum" sz="quarter" idx="10"/>
+          </p:nvPr>
+        </p:nvSpPr>
+        <p:spPr/>
+        <p:txBody>
+          <a:bodyPr/>
+          <a:lstStyle/>
+          <a:p>
+            <a:fld id="{F7021451-1387-4CA6-816F-3879F97B5CBC}" type="slidenum">
+              <a:rPr lang="en-US"/>
+              <a:t>13</a:t>
+            </a:fld>
+            <a:endParaRPr lang="en-US"/>
+          </a:p>
+        </p:txBody>
+      </p:sp>
+    </p:spTree>
+    <p:extLst>
+      <p:ext uri="{BB962C8B-B14F-4D97-AF65-F5344CB8AC3E}">
+        <p14:creationId xmlns:p14="http://schemas.microsoft.com/office/powerpoint/2010/main" val="1024086991"/>
+      </p:ext>
+    </p:extLst>
+  </p:cSld>
+  <p:clrMapOvr>
+    <a:masterClrMapping/>
+  </p:clrMapOvr>
+</p:notes>
+</file>
+
+<file path=ppt/notesSlides/notesSlide14.xml><?xml version="1.0" encoding="utf-8"?>
+<p:notes xmlns:a="http://schemas.openxmlformats.org/drawingml/2006/main" xmlns:r="http://schemas.openxmlformats.org/officeDocument/2006/relationships" xmlns:p="http://schemas.openxmlformats.org/presentationml/2006/main">
+  <p:cSld>
+    <p:spTree>
+      <p:nvGrpSpPr>
+        <p:cNvPr id="1" name=""/>
+        <p:cNvGrpSpPr/>
+        <p:nvPr/>
+      </p:nvGrpSpPr>
+      <p:grpSpPr>
+        <a:xfrm>
+          <a:off x="0" y="0"/>
+          <a:ext cx="0" cy="0"/>
+          <a:chOff x="0" y="0"/>
+          <a:chExt cx="0" cy="0"/>
+        </a:xfrm>
+      </p:grpSpPr>
+      <p:sp>
+        <p:nvSpPr>
+          <p:cNvPr id="2" name="Slide Image Placeholder 1"/>
+          <p:cNvSpPr>
+            <a:spLocks noGrp="1" noRot="1" noChangeAspect="1"/>
+          </p:cNvSpPr>
+          <p:nvPr>
+            <p:ph type="sldImg"/>
+          </p:nvPr>
+        </p:nvSpPr>
+        <p:spPr/>
+      </p:sp>
+      <p:sp>
+        <p:nvSpPr>
+          <p:cNvPr id="3" name="Notes Placeholder 2"/>
+          <p:cNvSpPr>
+            <a:spLocks noGrp="1"/>
+          </p:cNvSpPr>
+          <p:nvPr>
+            <p:ph type="body" idx="1"/>
+          </p:nvPr>
+        </p:nvSpPr>
+        <p:spPr/>
+        <p:txBody>
+          <a:bodyPr/>
+          <a:lstStyle/>
+          <a:p>
+            <a:r>
+              <a:rPr lang="en-US" dirty="0"/>
+              <a:t/>
+            </a:r>
+            <a:endParaRPr lang="en-US" dirty="0"/>
+          </a:p>
+        </p:txBody>
+      </p:sp>
+      <p:sp>
+        <p:nvSpPr>
+          <p:cNvPr id="4" name="Slide Number Placeholder 3"/>
+          <p:cNvSpPr>
+            <a:spLocks noGrp="1"/>
+          </p:cNvSpPr>
+          <p:nvPr>
+            <p:ph type="sldNum" sz="quarter" idx="10"/>
+          </p:nvPr>
+        </p:nvSpPr>
+        <p:spPr/>
+        <p:txBody>
+          <a:bodyPr/>
+          <a:lstStyle/>
+          <a:p>
+            <a:fld id="{F7021451-1387-4CA6-816F-3879F97B5CBC}" type="slidenum">
+              <a:rPr lang="en-US"/>
+              <a:t>14</a:t>
+            </a:fld>
+            <a:endParaRPr lang="en-US"/>
+          </a:p>
+        </p:txBody>
+      </p:sp>
+    </p:spTree>
+    <p:extLst>
+      <p:ext uri="{BB962C8B-B14F-4D97-AF65-F5344CB8AC3E}">
+        <p14:creationId xmlns:p14="http://schemas.microsoft.com/office/powerpoint/2010/main" val="1024086991"/>
+      </p:ext>
+    </p:extLst>
+  </p:cSld>
+  <p:clrMapOvr>
+    <a:masterClrMapping/>
+  </p:clrMapOvr>
+</p:notes>
+</file>
+
+<file path=ppt/notesSlides/notesSlide15.xml><?xml version="1.0" encoding="utf-8"?>
+<p:notes xmlns:a="http://schemas.openxmlformats.org/drawingml/2006/main" xmlns:r="http://schemas.openxmlformats.org/officeDocument/2006/relationships" xmlns:p="http://schemas.openxmlformats.org/presentationml/2006/main">
+  <p:cSld>
+    <p:spTree>
+      <p:nvGrpSpPr>
+        <p:cNvPr id="1" name=""/>
+        <p:cNvGrpSpPr/>
+        <p:nvPr/>
+      </p:nvGrpSpPr>
+      <p:grpSpPr>
+        <a:xfrm>
+          <a:off x="0" y="0"/>
+          <a:ext cx="0" cy="0"/>
+          <a:chOff x="0" y="0"/>
+          <a:chExt cx="0" cy="0"/>
+        </a:xfrm>
+      </p:grpSpPr>
+      <p:sp>
+        <p:nvSpPr>
+          <p:cNvPr id="2" name="Slide Image Placeholder 1"/>
+          <p:cNvSpPr>
+            <a:spLocks noGrp="1" noRot="1" noChangeAspect="1"/>
+          </p:cNvSpPr>
+          <p:nvPr>
+            <p:ph type="sldImg"/>
+          </p:nvPr>
+        </p:nvSpPr>
+        <p:spPr/>
+      </p:sp>
+      <p:sp>
+        <p:nvSpPr>
+          <p:cNvPr id="3" name="Notes Placeholder 2"/>
+          <p:cNvSpPr>
+            <a:spLocks noGrp="1"/>
+          </p:cNvSpPr>
+          <p:nvPr>
+            <p:ph type="body" idx="1"/>
+          </p:nvPr>
+        </p:nvSpPr>
+        <p:spPr/>
+        <p:txBody>
+          <a:bodyPr/>
+          <a:lstStyle/>
+          <a:p>
+            <a:r>
+              <a:rPr lang="en-US" dirty="0"/>
+              <a:t/>
+            </a:r>
+            <a:endParaRPr lang="en-US" dirty="0"/>
+          </a:p>
+        </p:txBody>
+      </p:sp>
+      <p:sp>
+        <p:nvSpPr>
+          <p:cNvPr id="4" name="Slide Number Placeholder 3"/>
+          <p:cNvSpPr>
+            <a:spLocks noGrp="1"/>
+          </p:cNvSpPr>
+          <p:nvPr>
+            <p:ph type="sldNum" sz="quarter" idx="10"/>
+          </p:nvPr>
+        </p:nvSpPr>
+        <p:spPr/>
+        <p:txBody>
+          <a:bodyPr/>
+          <a:lstStyle/>
+          <a:p>
+            <a:fld id="{F7021451-1387-4CA6-816F-3879F97B5CBC}" type="slidenum">
+              <a:rPr lang="en-US"/>
+              <a:t>15</a:t>
+            </a:fld>
+            <a:endParaRPr lang="en-US"/>
+          </a:p>
+        </p:txBody>
+      </p:sp>
+    </p:spTree>
+    <p:extLst>
+      <p:ext uri="{BB962C8B-B14F-4D97-AF65-F5344CB8AC3E}">
+        <p14:creationId xmlns:p14="http://schemas.microsoft.com/office/powerpoint/2010/main" val="1024086991"/>
+      </p:ext>
+    </p:extLst>
+  </p:cSld>
+  <p:clrMapOvr>
+    <a:masterClrMapping/>
+  </p:clrMapOvr>
+</p:notes>
+</file>
+
+<file path=ppt/notesSlides/notesSlide16.xml><?xml version="1.0" encoding="utf-8"?>
+<p:notes xmlns:a="http://schemas.openxmlformats.org/drawingml/2006/main" xmlns:r="http://schemas.openxmlformats.org/officeDocument/2006/relationships" xmlns:p="http://schemas.openxmlformats.org/presentationml/2006/main">
+  <p:cSld>
+    <p:spTree>
+      <p:nvGrpSpPr>
+        <p:cNvPr id="1" name=""/>
+        <p:cNvGrpSpPr/>
+        <p:nvPr/>
+      </p:nvGrpSpPr>
+      <p:grpSpPr>
+        <a:xfrm>
+          <a:off x="0" y="0"/>
+          <a:ext cx="0" cy="0"/>
+          <a:chOff x="0" y="0"/>
+          <a:chExt cx="0" cy="0"/>
+        </a:xfrm>
+      </p:grpSpPr>
+      <p:sp>
+        <p:nvSpPr>
+          <p:cNvPr id="2" name="Slide Image Placeholder 1"/>
+          <p:cNvSpPr>
+            <a:spLocks noGrp="1" noRot="1" noChangeAspect="1"/>
+          </p:cNvSpPr>
+          <p:nvPr>
+            <p:ph type="sldImg"/>
+          </p:nvPr>
+        </p:nvSpPr>
+        <p:spPr/>
+      </p:sp>
+      <p:sp>
+        <p:nvSpPr>
+          <p:cNvPr id="3" name="Notes Placeholder 2"/>
+          <p:cNvSpPr>
+            <a:spLocks noGrp="1"/>
+          </p:cNvSpPr>
+          <p:nvPr>
+            <p:ph type="body" idx="1"/>
+          </p:nvPr>
+        </p:nvSpPr>
+        <p:spPr/>
+        <p:txBody>
+          <a:bodyPr/>
+          <a:lstStyle/>
+          <a:p>
+            <a:r>
+              <a:rPr lang="en-US" dirty="0"/>
+              <a:t/>
+            </a:r>
+            <a:endParaRPr lang="en-US" dirty="0"/>
+          </a:p>
+        </p:txBody>
+      </p:sp>
+      <p:sp>
+        <p:nvSpPr>
+          <p:cNvPr id="4" name="Slide Number Placeholder 3"/>
+          <p:cNvSpPr>
+            <a:spLocks noGrp="1"/>
+          </p:cNvSpPr>
+          <p:nvPr>
+            <p:ph type="sldNum" sz="quarter" idx="10"/>
+          </p:nvPr>
+        </p:nvSpPr>
+        <p:spPr/>
+        <p:txBody>
+          <a:bodyPr/>
+          <a:lstStyle/>
+          <a:p>
+            <a:fld id="{F7021451-1387-4CA6-816F-3879F97B5CBC}" type="slidenum">
+              <a:rPr lang="en-US"/>
+              <a:t>16</a:t>
             </a:fld>
             <a:endParaRPr lang="en-US"/>
           </a:p>
@@ -1876,102 +2410,6 @@
         </p:nvSpPr>
         <p:spPr>
           <a:xfrm>
-            <a:off x="406301" y="1223963"/>
-            <a:ext cx="8498026" cy="274290"/>
-          </a:xfrm>
-          <a:prstGeom prst="rect">
-            <a:avLst/>
-          </a:prstGeom>
-          <a:noFill/>
-          <a:ln/>
-        </p:spPr>
-        <p:txBody>
-          <a:bodyPr wrap="square" lIns="0" tIns="0" rIns="0" bIns="0" rtlCol="0" anchor="t"/>
-          <a:lstStyle/>
-          <a:p>
-            <a:pPr algn="l" indent="0" marL="0">
-              <a:lnSpc>
-                <a:spcPts val="2160"/>
-              </a:lnSpc>
-              <a:spcBef>
-                <a:spcPts val="600"/>
-              </a:spcBef>
-              <a:spcAft>
-                <a:spcPts val="800"/>
-              </a:spcAft>
-              <a:buNone/>
-            </a:pPr>
-            <a:r>
-              <a:rPr lang="en-US" sz="1800" b="1" dirty="0">
-                <a:solidFill>
-                  <a:srgbClr val="E07A5F"/>
-                </a:solidFill>
-                <a:latin typeface="Georgia" pitchFamily="34" charset="0"/>
-                <a:ea typeface="Georgia" pitchFamily="34" charset="-122"/>
-                <a:cs typeface="Georgia" pitchFamily="34" charset="-120"/>
-              </a:rPr>
-              <a:t>Goal</a:t>
-            </a:r>
-            <a:endParaRPr lang="en-US" sz="1800" dirty="0"/>
-          </a:p>
-        </p:txBody>
-      </p:sp>
-      <p:sp>
-        <p:nvSpPr>
-          <p:cNvPr id="6" name="Text 4"/>
-          <p:cNvSpPr/>
-          <p:nvPr/>
-        </p:nvSpPr>
-        <p:spPr>
-          <a:xfrm>
-            <a:off x="406301" y="1637854"/>
-            <a:ext cx="8498026" cy="213271"/>
-          </a:xfrm>
-          <a:prstGeom prst="rect">
-            <a:avLst/>
-          </a:prstGeom>
-          <a:noFill/>
-          <a:ln/>
-        </p:spPr>
-        <p:txBody>
-          <a:bodyPr wrap="square" lIns="0" tIns="0" rIns="0" bIns="0" rtlCol="0" anchor="t"/>
-          <a:lstStyle/>
-          <a:p>
-            <a:pPr algn="l" indent="0" marL="0">
-              <a:lnSpc>
-                <a:spcPts val="1680"/>
-              </a:lnSpc>
-              <a:spcBef>
-                <a:spcPts val="300"/>
-              </a:spcBef>
-              <a:spcAft>
-                <a:spcPts val="300"/>
-              </a:spcAft>
-              <a:buNone/>
-            </a:pPr>
-            <a:r>
-              <a:rPr lang="en-US" sz="1200" dirty="0">
-                <a:solidFill>
-                  <a:srgbClr val="2C2C2C"/>
-                </a:solidFill>
-                <a:latin typeface="Verdana" pitchFamily="34" charset="0"/>
-                <a:ea typeface="Verdana" pitchFamily="34" charset="-122"/>
-                <a:cs typeface="Verdana" pitchFamily="34" charset="-120"/>
-              </a:rPr>
-              <a:t>Children learn the hand-multiplication trick for any pair from 6 to 9.</a:t>
-            </a:r>
-            <a:endParaRPr lang="en-US" sz="1200" dirty="0"/>
-          </a:p>
-        </p:txBody>
-      </p:sp>
-      <p:sp>
-        <p:nvSpPr>
-          <p:cNvPr id="7" name="Text 5"/>
-          <p:cNvSpPr/>
-          <p:nvPr/>
-        </p:nvSpPr>
-        <p:spPr>
-          <a:xfrm>
             <a:off x="406301" y="4434929"/>
             <a:ext cx="8498026" cy="213271"/>
           </a:xfrm>
@@ -2116,6 +2554,1962 @@
                 <a:ea typeface="Georgia" pitchFamily="34" charset="-122"/>
                 <a:cs typeface="Georgia" pitchFamily="34" charset="-120"/>
               </a:rPr>
+              <a:t>Practice (12 min)</a:t>
+            </a:r>
+            <a:endParaRPr lang="en-US" sz="1800" dirty="0"/>
+          </a:p>
+        </p:txBody>
+      </p:sp>
+      <p:sp>
+        <p:nvSpPr>
+          <p:cNvPr id="4" name="Text 2"/>
+          <p:cNvSpPr/>
+          <p:nvPr/>
+        </p:nvSpPr>
+        <p:spPr>
+          <a:xfrm>
+            <a:off x="634901" y="883593"/>
+            <a:ext cx="8102798" cy="582811"/>
+          </a:xfrm>
+          <a:prstGeom prst="rect">
+            <a:avLst/>
+          </a:prstGeom>
+          <a:noFill/>
+          <a:ln/>
+        </p:spPr>
+        <p:txBody>
+          <a:bodyPr wrap="square" lIns="0" tIns="0" rIns="0" bIns="0" rtlCol="0" anchor="t"/>
+          <a:lstStyle/>
+          <a:p>
+            <a:pPr algn="l" marL="342900" indent="-342900">
+              <a:lnSpc>
+                <a:spcPts val="1620"/>
+              </a:lnSpc>
+              <a:spcAft>
+                <a:spcPts val="300"/>
+              </a:spcAft>
+              <a:buSzPct val="100000"/>
+              <a:buChar char="•"/>
+            </a:pPr>
+            <a:r>
+              <a:rPr lang="en-US" sz="1200" dirty="0">
+                <a:solidFill>
+                  <a:srgbClr val="2C2C2C"/>
+                </a:solidFill>
+                <a:latin typeface="Verdana" pitchFamily="34" charset="0"/>
+                <a:ea typeface="Verdana" pitchFamily="34" charset="-122"/>
+                <a:cs typeface="Verdana" pitchFamily="34" charset="-120"/>
+              </a:rPr>
+              <a:t>Whole class: teacher calls </a:t>
+            </a:r>
+            <a:pPr algn="l" indent="0" marL="0">
+              <a:lnSpc>
+                <a:spcPts val="1620"/>
+              </a:lnSpc>
+              <a:spcAft>
+                <a:spcPts val="300"/>
+              </a:spcAft>
+              <a:buNone/>
+            </a:pPr>
+            <a:r>
+              <a:rPr lang="en-US" sz="1200" dirty="0">
+                <a:solidFill>
+                  <a:srgbClr val="2C2C2C"/>
+                </a:solidFill>
+                <a:latin typeface="Verdana" pitchFamily="34" charset="0"/>
+                <a:ea typeface="Verdana" pitchFamily="34" charset="-122"/>
+                <a:cs typeface="Verdana" pitchFamily="34" charset="-120"/>
+              </a:rPr>
+              <a:t>7 × 6</a:t>
+            </a:r>
+            <a:pPr algn="l" indent="0" marL="0">
+              <a:lnSpc>
+                <a:spcPts val="1620"/>
+              </a:lnSpc>
+              <a:spcAft>
+                <a:spcPts val="300"/>
+              </a:spcAft>
+              <a:buNone/>
+            </a:pPr>
+            <a:r>
+              <a:rPr lang="en-US" sz="1200" dirty="0">
+                <a:solidFill>
+                  <a:srgbClr val="2C2C2C"/>
+                </a:solidFill>
+                <a:latin typeface="Verdana" pitchFamily="34" charset="0"/>
+                <a:ea typeface="Verdana" pitchFamily="34" charset="-122"/>
+                <a:cs typeface="Verdana" pitchFamily="34" charset="-120"/>
+              </a:rPr>
+              <a:t>. Children put up hands and find the answer (42).</a:t>
+            </a:r>
+            <a:endParaRPr lang="en-US" sz="1200" dirty="0"/>
+          </a:p>
+          <a:p>
+            <a:pPr algn="l" marL="342900" indent="-342900">
+              <a:lnSpc>
+                <a:spcPts val="1620"/>
+              </a:lnSpc>
+              <a:spcAft>
+                <a:spcPts val="300"/>
+              </a:spcAft>
+              <a:buSzPct val="100000"/>
+              <a:buChar char="•"/>
+            </a:pPr>
+            <a:r>
+              <a:rPr lang="en-US" sz="1200" dirty="0">
+                <a:solidFill>
+                  <a:srgbClr val="2C2C2C"/>
+                </a:solidFill>
+                <a:latin typeface="Verdana" pitchFamily="34" charset="0"/>
+                <a:ea typeface="Verdana" pitchFamily="34" charset="-122"/>
+                <a:cs typeface="Verdana" pitchFamily="34" charset="-120"/>
+              </a:rPr>
+              <a:t>5 problems chorus: </a:t>
+            </a:r>
+            <a:pPr algn="l" indent="0" marL="0">
+              <a:lnSpc>
+                <a:spcPts val="1620"/>
+              </a:lnSpc>
+              <a:spcAft>
+                <a:spcPts val="300"/>
+              </a:spcAft>
+              <a:buNone/>
+            </a:pPr>
+            <a:r>
+              <a:rPr lang="en-US" sz="1200" dirty="0">
+                <a:solidFill>
+                  <a:srgbClr val="2C2C2C"/>
+                </a:solidFill>
+                <a:latin typeface="Verdana" pitchFamily="34" charset="0"/>
+                <a:ea typeface="Verdana" pitchFamily="34" charset="-122"/>
+                <a:cs typeface="Verdana" pitchFamily="34" charset="-120"/>
+              </a:rPr>
+              <a:t>9 × 9</a:t>
+            </a:r>
+            <a:pPr algn="l" indent="0" marL="0">
+              <a:lnSpc>
+                <a:spcPts val="1620"/>
+              </a:lnSpc>
+              <a:spcAft>
+                <a:spcPts val="300"/>
+              </a:spcAft>
+              <a:buNone/>
+            </a:pPr>
+            <a:r>
+              <a:rPr lang="en-US" sz="1200" dirty="0">
+                <a:solidFill>
+                  <a:srgbClr val="2C2C2C"/>
+                </a:solidFill>
+                <a:latin typeface="Verdana" pitchFamily="34" charset="0"/>
+                <a:ea typeface="Verdana" pitchFamily="34" charset="-122"/>
+                <a:cs typeface="Verdana" pitchFamily="34" charset="-120"/>
+              </a:rPr>
+              <a:t> (81), </a:t>
+            </a:r>
+            <a:pPr algn="l" indent="0" marL="0">
+              <a:lnSpc>
+                <a:spcPts val="1620"/>
+              </a:lnSpc>
+              <a:spcAft>
+                <a:spcPts val="300"/>
+              </a:spcAft>
+              <a:buNone/>
+            </a:pPr>
+            <a:r>
+              <a:rPr lang="en-US" sz="1200" dirty="0">
+                <a:solidFill>
+                  <a:srgbClr val="2C2C2C"/>
+                </a:solidFill>
+                <a:latin typeface="Verdana" pitchFamily="34" charset="0"/>
+                <a:ea typeface="Verdana" pitchFamily="34" charset="-122"/>
+                <a:cs typeface="Verdana" pitchFamily="34" charset="-120"/>
+              </a:rPr>
+              <a:t>6 × 7</a:t>
+            </a:r>
+            <a:pPr algn="l" indent="0" marL="0">
+              <a:lnSpc>
+                <a:spcPts val="1620"/>
+              </a:lnSpc>
+              <a:spcAft>
+                <a:spcPts val="300"/>
+              </a:spcAft>
+              <a:buNone/>
+            </a:pPr>
+            <a:r>
+              <a:rPr lang="en-US" sz="1200" dirty="0">
+                <a:solidFill>
+                  <a:srgbClr val="2C2C2C"/>
+                </a:solidFill>
+                <a:latin typeface="Verdana" pitchFamily="34" charset="0"/>
+                <a:ea typeface="Verdana" pitchFamily="34" charset="-122"/>
+                <a:cs typeface="Verdana" pitchFamily="34" charset="-120"/>
+              </a:rPr>
+              <a:t> (42), </a:t>
+            </a:r>
+            <a:pPr algn="l" indent="0" marL="0">
+              <a:lnSpc>
+                <a:spcPts val="1620"/>
+              </a:lnSpc>
+              <a:spcAft>
+                <a:spcPts val="300"/>
+              </a:spcAft>
+              <a:buNone/>
+            </a:pPr>
+            <a:r>
+              <a:rPr lang="en-US" sz="1200" dirty="0">
+                <a:solidFill>
+                  <a:srgbClr val="2C2C2C"/>
+                </a:solidFill>
+                <a:latin typeface="Verdana" pitchFamily="34" charset="0"/>
+                <a:ea typeface="Verdana" pitchFamily="34" charset="-122"/>
+                <a:cs typeface="Verdana" pitchFamily="34" charset="-120"/>
+              </a:rPr>
+              <a:t>8 × 8</a:t>
+            </a:r>
+            <a:pPr algn="l" indent="0" marL="0">
+              <a:lnSpc>
+                <a:spcPts val="1620"/>
+              </a:lnSpc>
+              <a:spcAft>
+                <a:spcPts val="300"/>
+              </a:spcAft>
+              <a:buNone/>
+            </a:pPr>
+            <a:r>
+              <a:rPr lang="en-US" sz="1200" dirty="0">
+                <a:solidFill>
+                  <a:srgbClr val="2C2C2C"/>
+                </a:solidFill>
+                <a:latin typeface="Verdana" pitchFamily="34" charset="0"/>
+                <a:ea typeface="Verdana" pitchFamily="34" charset="-122"/>
+                <a:cs typeface="Verdana" pitchFamily="34" charset="-120"/>
+              </a:rPr>
+              <a:t> (64), </a:t>
+            </a:r>
+            <a:pPr algn="l" indent="0" marL="0">
+              <a:lnSpc>
+                <a:spcPts val="1620"/>
+              </a:lnSpc>
+              <a:spcAft>
+                <a:spcPts val="300"/>
+              </a:spcAft>
+              <a:buNone/>
+            </a:pPr>
+            <a:r>
+              <a:rPr lang="en-US" sz="1200" dirty="0">
+                <a:solidFill>
+                  <a:srgbClr val="2C2C2C"/>
+                </a:solidFill>
+                <a:latin typeface="Verdana" pitchFamily="34" charset="0"/>
+                <a:ea typeface="Verdana" pitchFamily="34" charset="-122"/>
+                <a:cs typeface="Verdana" pitchFamily="34" charset="-120"/>
+              </a:rPr>
+              <a:t>9 × 6</a:t>
+            </a:r>
+            <a:pPr algn="l" indent="0" marL="0">
+              <a:lnSpc>
+                <a:spcPts val="1620"/>
+              </a:lnSpc>
+              <a:spcAft>
+                <a:spcPts val="300"/>
+              </a:spcAft>
+              <a:buNone/>
+            </a:pPr>
+            <a:r>
+              <a:rPr lang="en-US" sz="1200" dirty="0">
+                <a:solidFill>
+                  <a:srgbClr val="2C2C2C"/>
+                </a:solidFill>
+                <a:latin typeface="Verdana" pitchFamily="34" charset="0"/>
+                <a:ea typeface="Verdana" pitchFamily="34" charset="-122"/>
+                <a:cs typeface="Verdana" pitchFamily="34" charset="-120"/>
+              </a:rPr>
+              <a:t> (54), </a:t>
+            </a:r>
+            <a:pPr algn="l" indent="0" marL="0">
+              <a:lnSpc>
+                <a:spcPts val="1620"/>
+              </a:lnSpc>
+              <a:spcAft>
+                <a:spcPts val="300"/>
+              </a:spcAft>
+              <a:buNone/>
+            </a:pPr>
+            <a:r>
+              <a:rPr lang="en-US" sz="1200" dirty="0">
+                <a:solidFill>
+                  <a:srgbClr val="2C2C2C"/>
+                </a:solidFill>
+                <a:latin typeface="Verdana" pitchFamily="34" charset="0"/>
+                <a:ea typeface="Verdana" pitchFamily="34" charset="-122"/>
+                <a:cs typeface="Verdana" pitchFamily="34" charset="-120"/>
+              </a:rPr>
+              <a:t>7 × 9</a:t>
+            </a:r>
+            <a:pPr algn="l" indent="0" marL="0">
+              <a:lnSpc>
+                <a:spcPts val="1620"/>
+              </a:lnSpc>
+              <a:spcAft>
+                <a:spcPts val="300"/>
+              </a:spcAft>
+              <a:buNone/>
+            </a:pPr>
+            <a:r>
+              <a:rPr lang="en-US" sz="1200" dirty="0">
+                <a:solidFill>
+                  <a:srgbClr val="2C2C2C"/>
+                </a:solidFill>
+                <a:latin typeface="Verdana" pitchFamily="34" charset="0"/>
+                <a:ea typeface="Verdana" pitchFamily="34" charset="-122"/>
+                <a:cs typeface="Verdana" pitchFamily="34" charset="-120"/>
+              </a:rPr>
+              <a:t> (63).</a:t>
+            </a:r>
+            <a:endParaRPr lang="en-US" sz="1200" dirty="0"/>
+          </a:p>
+        </p:txBody>
+      </p:sp>
+      <p:sp>
+        <p:nvSpPr>
+          <p:cNvPr id="5" name="Text 3"/>
+          <p:cNvSpPr/>
+          <p:nvPr/>
+        </p:nvSpPr>
+        <p:spPr>
+          <a:xfrm>
+            <a:off x="406301" y="4434929"/>
+            <a:ext cx="8498026" cy="213271"/>
+          </a:xfrm>
+          <a:prstGeom prst="rect">
+            <a:avLst/>
+          </a:prstGeom>
+          <a:noFill/>
+          <a:ln/>
+        </p:spPr>
+        <p:txBody>
+          <a:bodyPr wrap="square" lIns="0" tIns="0" rIns="0" bIns="0" rtlCol="0" anchor="t"/>
+          <a:lstStyle/>
+          <a:p>
+            <a:pPr algn="l" indent="0" marL="0">
+              <a:lnSpc>
+                <a:spcPts val="1680"/>
+              </a:lnSpc>
+              <a:spcBef>
+                <a:spcPts val="300"/>
+              </a:spcBef>
+              <a:spcAft>
+                <a:spcPts val="300"/>
+              </a:spcAft>
+              <a:buNone/>
+            </a:pPr>
+            <a:r>
+              <a:rPr lang="en-US" sz="1200" dirty="0">
+                <a:solidFill>
+                  <a:srgbClr val="2C2C2C"/>
+                </a:solidFill>
+                <a:latin typeface="Verdana" pitchFamily="34" charset="0"/>
+                <a:ea typeface="Verdana" pitchFamily="34" charset="-122"/>
+                <a:cs typeface="Verdana" pitchFamily="34" charset="-120"/>
+              </a:rPr>
+              <a:t>Primary ·  · IKS Curriculum</a:t>
+            </a:r>
+            <a:endParaRPr lang="en-US" sz="1200" dirty="0"/>
+          </a:p>
+        </p:txBody>
+      </p:sp>
+    </p:spTree>
+  </p:cSld>
+  <p:clrMapOvr>
+    <a:masterClrMapping/>
+  </p:clrMapOvr>
+</p:sld>
+</file>
+
+<file path=ppt/slides/slide11.xml><?xml version="1.0" encoding="utf-8"?>
+<p:sld xmlns:a="http://schemas.openxmlformats.org/drawingml/2006/main" xmlns:r="http://schemas.openxmlformats.org/officeDocument/2006/relationships" xmlns:p="http://schemas.openxmlformats.org/presentationml/2006/main">
+  <p:cSld name="Slide 11">
+    <p:bg>
+      <p:bgPr>
+        <a:solidFill>
+          <a:srgbClr val="FAF7F2"/>
+        </a:solidFill>
+      </p:bgPr>
+    </p:bg>
+    <p:spTree>
+      <p:nvGrpSpPr>
+        <p:cNvPr id="1" name=""/>
+        <p:cNvGrpSpPr/>
+        <p:nvPr/>
+      </p:nvGrpSpPr>
+      <p:grpSpPr>
+        <a:xfrm>
+          <a:off x="0" y="0"/>
+          <a:ext cx="0" cy="0"/>
+          <a:chOff x="0" y="0"/>
+          <a:chExt cx="0" cy="0"/>
+        </a:xfrm>
+      </p:grpSpPr>
+      <p:sp>
+        <p:nvSpPr>
+          <p:cNvPr id="2" name="Text 0"/>
+          <p:cNvSpPr/>
+          <p:nvPr/>
+        </p:nvSpPr>
+        <p:spPr>
+          <a:xfrm>
+            <a:off x="0" y="0"/>
+            <a:ext cx="9144000" cy="101501"/>
+          </a:xfrm>
+          <a:prstGeom prst="rect">
+            <a:avLst/>
+          </a:prstGeom>
+          <a:solidFill>
+            <a:srgbClr val="87A96B"/>
+          </a:solidFill>
+          <a:ln/>
+        </p:spPr>
+        <p:txBody>
+          <a:bodyPr wrap="square" rtlCol="0" anchor="ctr"/>
+          <a:lstStyle/>
+          <a:p>
+            <a:pPr indent="0" marL="0">
+              <a:buNone/>
+            </a:pPr>
+            <a:endParaRPr lang="en-US" dirty="0"/>
+          </a:p>
+        </p:txBody>
+      </p:sp>
+      <p:sp>
+        <p:nvSpPr>
+          <p:cNvPr id="3" name="Text 1"/>
+          <p:cNvSpPr/>
+          <p:nvPr/>
+        </p:nvSpPr>
+        <p:spPr>
+          <a:xfrm>
+            <a:off x="406301" y="457051"/>
+            <a:ext cx="8498026" cy="274290"/>
+          </a:xfrm>
+          <a:prstGeom prst="rect">
+            <a:avLst/>
+          </a:prstGeom>
+          <a:noFill/>
+          <a:ln/>
+        </p:spPr>
+        <p:txBody>
+          <a:bodyPr wrap="square" lIns="0" tIns="0" rIns="0" bIns="0" rtlCol="0" anchor="t"/>
+          <a:lstStyle/>
+          <a:p>
+            <a:pPr algn="l" indent="0" marL="0">
+              <a:lnSpc>
+                <a:spcPts val="2160"/>
+              </a:lnSpc>
+              <a:spcBef>
+                <a:spcPts val="600"/>
+              </a:spcBef>
+              <a:spcAft>
+                <a:spcPts val="800"/>
+              </a:spcAft>
+              <a:buNone/>
+            </a:pPr>
+            <a:r>
+              <a:rPr lang="en-US" sz="1800" b="1" dirty="0">
+                <a:solidFill>
+                  <a:srgbClr val="E07A5F"/>
+                </a:solidFill>
+                <a:latin typeface="Georgia" pitchFamily="34" charset="0"/>
+                <a:ea typeface="Georgia" pitchFamily="34" charset="-122"/>
+                <a:cs typeface="Georgia" pitchFamily="34" charset="-120"/>
+              </a:rPr>
+              <a:t>Practice (12 min) (cont.)</a:t>
+            </a:r>
+            <a:endParaRPr lang="en-US" sz="1800" dirty="0"/>
+          </a:p>
+        </p:txBody>
+      </p:sp>
+      <p:sp>
+        <p:nvSpPr>
+          <p:cNvPr id="4" name="Text 2"/>
+          <p:cNvSpPr/>
+          <p:nvPr/>
+        </p:nvSpPr>
+        <p:spPr>
+          <a:xfrm>
+            <a:off x="634901" y="883593"/>
+            <a:ext cx="8102798" cy="1013222"/>
+          </a:xfrm>
+          <a:prstGeom prst="rect">
+            <a:avLst/>
+          </a:prstGeom>
+          <a:noFill/>
+          <a:ln/>
+        </p:spPr>
+        <p:txBody>
+          <a:bodyPr wrap="square" lIns="0" tIns="0" rIns="0" bIns="0" rtlCol="0" anchor="t"/>
+          <a:lstStyle/>
+          <a:p>
+            <a:pPr algn="l" marL="342900" indent="-342900">
+              <a:lnSpc>
+                <a:spcPts val="1620"/>
+              </a:lnSpc>
+              <a:spcAft>
+                <a:spcPts val="300"/>
+              </a:spcAft>
+              <a:buSzPct val="100000"/>
+              <a:buChar char="•"/>
+            </a:pPr>
+            <a:r>
+              <a:rPr lang="en-US" sz="1200" dirty="0">
+                <a:solidFill>
+                  <a:srgbClr val="2C2C2C"/>
+                </a:solidFill>
+                <a:latin typeface="Verdana" pitchFamily="34" charset="0"/>
+                <a:ea typeface="Verdana" pitchFamily="34" charset="-122"/>
+                <a:cs typeface="Verdana" pitchFamily="34" charset="-120"/>
+              </a:rPr>
+              <a:t>Pair drill (last 7 min):</a:t>
+            </a:r>
+            <a:endParaRPr lang="en-US" sz="1200" dirty="0"/>
+          </a:p>
+          <a:p>
+            <a:pPr algn="l" marL="342900" indent="-342900">
+              <a:lnSpc>
+                <a:spcPts val="1620"/>
+              </a:lnSpc>
+              <a:spcAft>
+                <a:spcPts val="300"/>
+              </a:spcAft>
+              <a:buSzPct val="100000"/>
+              <a:buChar char="•"/>
+            </a:pPr>
+            <a:r>
+              <a:rPr lang="en-US" sz="1200" dirty="0">
+                <a:solidFill>
+                  <a:srgbClr val="2C2C2C"/>
+                </a:solidFill>
+                <a:latin typeface="Verdana" pitchFamily="34" charset="0"/>
+                <a:ea typeface="Verdana" pitchFamily="34" charset="-122"/>
+                <a:cs typeface="Verdana" pitchFamily="34" charset="-120"/>
+              </a:rPr>
+              <a:t>Partner A calls a problem (any from 6×6 to 9×9).</a:t>
+            </a:r>
+            <a:endParaRPr lang="en-US" sz="1200" dirty="0"/>
+          </a:p>
+          <a:p>
+            <a:pPr algn="l" marL="342900" indent="-342900">
+              <a:lnSpc>
+                <a:spcPts val="1620"/>
+              </a:lnSpc>
+              <a:spcAft>
+                <a:spcPts val="300"/>
+              </a:spcAft>
+              <a:buSzPct val="100000"/>
+              <a:buChar char="•"/>
+            </a:pPr>
+            <a:r>
+              <a:rPr lang="en-US" sz="1200" dirty="0">
+                <a:solidFill>
+                  <a:srgbClr val="2C2C2C"/>
+                </a:solidFill>
+                <a:latin typeface="Verdana" pitchFamily="34" charset="0"/>
+                <a:ea typeface="Verdana" pitchFamily="34" charset="-122"/>
+                <a:cs typeface="Verdana" pitchFamily="34" charset="-120"/>
+              </a:rPr>
+              <a:t>Partner B answers using the finger trick.</a:t>
+            </a:r>
+            <a:endParaRPr lang="en-US" sz="1200" dirty="0"/>
+          </a:p>
+          <a:p>
+            <a:pPr algn="l" marL="342900" indent="-342900">
+              <a:lnSpc>
+                <a:spcPts val="1620"/>
+              </a:lnSpc>
+              <a:spcAft>
+                <a:spcPts val="300"/>
+              </a:spcAft>
+              <a:buSzPct val="100000"/>
+              <a:buChar char="•"/>
+            </a:pPr>
+            <a:r>
+              <a:rPr lang="en-US" sz="1200" dirty="0">
+                <a:solidFill>
+                  <a:srgbClr val="2C2C2C"/>
+                </a:solidFill>
+                <a:latin typeface="Verdana" pitchFamily="34" charset="0"/>
+                <a:ea typeface="Verdana" pitchFamily="34" charset="-122"/>
+                <a:cs typeface="Verdana" pitchFamily="34" charset="-120"/>
+              </a:rPr>
+              <a:t>Swap.</a:t>
+            </a:r>
+            <a:endParaRPr lang="en-US" sz="1200" dirty="0"/>
+          </a:p>
+        </p:txBody>
+      </p:sp>
+      <p:sp>
+        <p:nvSpPr>
+          <p:cNvPr id="5" name="Text 3"/>
+          <p:cNvSpPr/>
+          <p:nvPr/>
+        </p:nvSpPr>
+        <p:spPr>
+          <a:xfrm>
+            <a:off x="406301" y="4434929"/>
+            <a:ext cx="8498026" cy="213271"/>
+          </a:xfrm>
+          <a:prstGeom prst="rect">
+            <a:avLst/>
+          </a:prstGeom>
+          <a:noFill/>
+          <a:ln/>
+        </p:spPr>
+        <p:txBody>
+          <a:bodyPr wrap="square" lIns="0" tIns="0" rIns="0" bIns="0" rtlCol="0" anchor="t"/>
+          <a:lstStyle/>
+          <a:p>
+            <a:pPr algn="l" indent="0" marL="0">
+              <a:lnSpc>
+                <a:spcPts val="1680"/>
+              </a:lnSpc>
+              <a:spcBef>
+                <a:spcPts val="300"/>
+              </a:spcBef>
+              <a:spcAft>
+                <a:spcPts val="300"/>
+              </a:spcAft>
+              <a:buNone/>
+            </a:pPr>
+            <a:r>
+              <a:rPr lang="en-US" sz="1200" dirty="0">
+                <a:solidFill>
+                  <a:srgbClr val="2C2C2C"/>
+                </a:solidFill>
+                <a:latin typeface="Verdana" pitchFamily="34" charset="0"/>
+                <a:ea typeface="Verdana" pitchFamily="34" charset="-122"/>
+                <a:cs typeface="Verdana" pitchFamily="34" charset="-120"/>
+              </a:rPr>
+              <a:t>Primary ·  · IKS Curriculum</a:t>
+            </a:r>
+            <a:endParaRPr lang="en-US" sz="1200" dirty="0"/>
+          </a:p>
+        </p:txBody>
+      </p:sp>
+    </p:spTree>
+  </p:cSld>
+  <p:clrMapOvr>
+    <a:masterClrMapping/>
+  </p:clrMapOvr>
+</p:sld>
+</file>
+
+<file path=ppt/slides/slide12.xml><?xml version="1.0" encoding="utf-8"?>
+<p:sld xmlns:a="http://schemas.openxmlformats.org/drawingml/2006/main" xmlns:r="http://schemas.openxmlformats.org/officeDocument/2006/relationships" xmlns:p="http://schemas.openxmlformats.org/presentationml/2006/main">
+  <p:cSld name="Slide 12">
+    <p:bg>
+      <p:bgPr>
+        <a:solidFill>
+          <a:srgbClr val="FAF7F2"/>
+        </a:solidFill>
+      </p:bgPr>
+    </p:bg>
+    <p:spTree>
+      <p:nvGrpSpPr>
+        <p:cNvPr id="1" name=""/>
+        <p:cNvGrpSpPr/>
+        <p:nvPr/>
+      </p:nvGrpSpPr>
+      <p:grpSpPr>
+        <a:xfrm>
+          <a:off x="0" y="0"/>
+          <a:ext cx="0" cy="0"/>
+          <a:chOff x="0" y="0"/>
+          <a:chExt cx="0" cy="0"/>
+        </a:xfrm>
+      </p:grpSpPr>
+      <p:sp>
+        <p:nvSpPr>
+          <p:cNvPr id="2" name="Text 0"/>
+          <p:cNvSpPr/>
+          <p:nvPr/>
+        </p:nvSpPr>
+        <p:spPr>
+          <a:xfrm>
+            <a:off x="0" y="0"/>
+            <a:ext cx="9144000" cy="101501"/>
+          </a:xfrm>
+          <a:prstGeom prst="rect">
+            <a:avLst/>
+          </a:prstGeom>
+          <a:solidFill>
+            <a:srgbClr val="87A96B"/>
+          </a:solidFill>
+          <a:ln/>
+        </p:spPr>
+        <p:txBody>
+          <a:bodyPr wrap="square" rtlCol="0" anchor="ctr"/>
+          <a:lstStyle/>
+          <a:p>
+            <a:pPr indent="0" marL="0">
+              <a:buNone/>
+            </a:pPr>
+            <a:endParaRPr lang="en-US" dirty="0"/>
+          </a:p>
+        </p:txBody>
+      </p:sp>
+      <p:sp>
+        <p:nvSpPr>
+          <p:cNvPr id="3" name="Text 1"/>
+          <p:cNvSpPr/>
+          <p:nvPr/>
+        </p:nvSpPr>
+        <p:spPr>
+          <a:xfrm>
+            <a:off x="406301" y="457051"/>
+            <a:ext cx="8498026" cy="274290"/>
+          </a:xfrm>
+          <a:prstGeom prst="rect">
+            <a:avLst/>
+          </a:prstGeom>
+          <a:noFill/>
+          <a:ln/>
+        </p:spPr>
+        <p:txBody>
+          <a:bodyPr wrap="square" lIns="0" tIns="0" rIns="0" bIns="0" rtlCol="0" anchor="t"/>
+          <a:lstStyle/>
+          <a:p>
+            <a:pPr algn="l" indent="0" marL="0">
+              <a:lnSpc>
+                <a:spcPts val="2160"/>
+              </a:lnSpc>
+              <a:spcBef>
+                <a:spcPts val="600"/>
+              </a:spcBef>
+              <a:spcAft>
+                <a:spcPts val="800"/>
+              </a:spcAft>
+              <a:buNone/>
+            </a:pPr>
+            <a:r>
+              <a:rPr lang="en-US" sz="1800" b="1" dirty="0">
+                <a:solidFill>
+                  <a:srgbClr val="E07A5F"/>
+                </a:solidFill>
+                <a:latin typeface="Georgia" pitchFamily="34" charset="0"/>
+                <a:ea typeface="Georgia" pitchFamily="34" charset="-122"/>
+                <a:cs typeface="Georgia" pitchFamily="34" charset="-120"/>
+              </a:rPr>
+              <a:t>Show + chant (5 min)</a:t>
+            </a:r>
+            <a:endParaRPr lang="en-US" sz="1800" dirty="0"/>
+          </a:p>
+        </p:txBody>
+      </p:sp>
+      <p:sp>
+        <p:nvSpPr>
+          <p:cNvPr id="4" name="Text 2"/>
+          <p:cNvSpPr/>
+          <p:nvPr/>
+        </p:nvSpPr>
+        <p:spPr>
+          <a:xfrm>
+            <a:off x="634901" y="883593"/>
+            <a:ext cx="8102798" cy="525661"/>
+          </a:xfrm>
+          <a:prstGeom prst="rect">
+            <a:avLst/>
+          </a:prstGeom>
+          <a:noFill/>
+          <a:ln/>
+        </p:spPr>
+        <p:txBody>
+          <a:bodyPr wrap="square" lIns="0" tIns="0" rIns="0" bIns="0" rtlCol="0" anchor="t"/>
+          <a:lstStyle/>
+          <a:p>
+            <a:pPr algn="l" marL="342900" indent="-342900">
+              <a:lnSpc>
+                <a:spcPts val="1620"/>
+              </a:lnSpc>
+              <a:spcAft>
+                <a:spcPts val="300"/>
+              </a:spcAft>
+              <a:buSzPct val="100000"/>
+              <a:buChar char="•"/>
+            </a:pPr>
+            <a:r>
+              <a:rPr lang="en-US" sz="1200" dirty="0">
+                <a:solidFill>
+                  <a:srgbClr val="2C2C2C"/>
+                </a:solidFill>
+                <a:latin typeface="Verdana" pitchFamily="34" charset="0"/>
+                <a:ea typeface="Verdana" pitchFamily="34" charset="-122"/>
+                <a:cs typeface="Verdana" pitchFamily="34" charset="-120"/>
+              </a:rPr>
+              <a:t>"Who got 9 × 9 = 81 using their hands?" — hands up.</a:t>
+            </a:r>
+            <a:endParaRPr lang="en-US" sz="1200" dirty="0"/>
+          </a:p>
+          <a:p>
+            <a:pPr algn="l" marL="342900" indent="-342900">
+              <a:lnSpc>
+                <a:spcPts val="1620"/>
+              </a:lnSpc>
+              <a:spcAft>
+                <a:spcPts val="300"/>
+              </a:spcAft>
+              <a:buSzPct val="100000"/>
+              <a:buChar char="•"/>
+            </a:pPr>
+            <a:r>
+              <a:rPr lang="en-US" sz="1200" dirty="0">
+                <a:solidFill>
+                  <a:srgbClr val="2C2C2C"/>
+                </a:solidFill>
+                <a:latin typeface="Verdana" pitchFamily="34" charset="0"/>
+                <a:ea typeface="Verdana" pitchFamily="34" charset="-122"/>
+                <a:cs typeface="Verdana" pitchFamily="34" charset="-120"/>
+              </a:rPr>
+              <a:t>Final chant.</a:t>
+            </a:r>
+            <a:endParaRPr lang="en-US" sz="1200" dirty="0"/>
+          </a:p>
+        </p:txBody>
+      </p:sp>
+      <p:sp>
+        <p:nvSpPr>
+          <p:cNvPr id="5" name="Text 3"/>
+          <p:cNvSpPr/>
+          <p:nvPr/>
+        </p:nvSpPr>
+        <p:spPr>
+          <a:xfrm>
+            <a:off x="406301" y="4434929"/>
+            <a:ext cx="8498026" cy="213271"/>
+          </a:xfrm>
+          <a:prstGeom prst="rect">
+            <a:avLst/>
+          </a:prstGeom>
+          <a:noFill/>
+          <a:ln/>
+        </p:spPr>
+        <p:txBody>
+          <a:bodyPr wrap="square" lIns="0" tIns="0" rIns="0" bIns="0" rtlCol="0" anchor="t"/>
+          <a:lstStyle/>
+          <a:p>
+            <a:pPr algn="l" indent="0" marL="0">
+              <a:lnSpc>
+                <a:spcPts val="1680"/>
+              </a:lnSpc>
+              <a:spcBef>
+                <a:spcPts val="300"/>
+              </a:spcBef>
+              <a:spcAft>
+                <a:spcPts val="300"/>
+              </a:spcAft>
+              <a:buNone/>
+            </a:pPr>
+            <a:r>
+              <a:rPr lang="en-US" sz="1200" dirty="0">
+                <a:solidFill>
+                  <a:srgbClr val="2C2C2C"/>
+                </a:solidFill>
+                <a:latin typeface="Verdana" pitchFamily="34" charset="0"/>
+                <a:ea typeface="Verdana" pitchFamily="34" charset="-122"/>
+                <a:cs typeface="Verdana" pitchFamily="34" charset="-120"/>
+              </a:rPr>
+              <a:t>Primary ·  · IKS Curriculum</a:t>
+            </a:r>
+            <a:endParaRPr lang="en-US" sz="1200" dirty="0"/>
+          </a:p>
+        </p:txBody>
+      </p:sp>
+    </p:spTree>
+  </p:cSld>
+  <p:clrMapOvr>
+    <a:masterClrMapping/>
+  </p:clrMapOvr>
+</p:sld>
+</file>
+
+<file path=ppt/slides/slide13.xml><?xml version="1.0" encoding="utf-8"?>
+<p:sld xmlns:a="http://schemas.openxmlformats.org/drawingml/2006/main" xmlns:r="http://schemas.openxmlformats.org/officeDocument/2006/relationships" xmlns:p="http://schemas.openxmlformats.org/presentationml/2006/main">
+  <p:cSld name="Slide 13">
+    <p:bg>
+      <p:bgPr>
+        <a:solidFill>
+          <a:srgbClr val="FAF7F2"/>
+        </a:solidFill>
+      </p:bgPr>
+    </p:bg>
+    <p:spTree>
+      <p:nvGrpSpPr>
+        <p:cNvPr id="1" name=""/>
+        <p:cNvGrpSpPr/>
+        <p:nvPr/>
+      </p:nvGrpSpPr>
+      <p:grpSpPr>
+        <a:xfrm>
+          <a:off x="0" y="0"/>
+          <a:ext cx="0" cy="0"/>
+          <a:chOff x="0" y="0"/>
+          <a:chExt cx="0" cy="0"/>
+        </a:xfrm>
+      </p:grpSpPr>
+      <p:sp>
+        <p:nvSpPr>
+          <p:cNvPr id="2" name="Text 0"/>
+          <p:cNvSpPr/>
+          <p:nvPr/>
+        </p:nvSpPr>
+        <p:spPr>
+          <a:xfrm>
+            <a:off x="0" y="0"/>
+            <a:ext cx="9144000" cy="101501"/>
+          </a:xfrm>
+          <a:prstGeom prst="rect">
+            <a:avLst/>
+          </a:prstGeom>
+          <a:solidFill>
+            <a:srgbClr val="87A96B"/>
+          </a:solidFill>
+          <a:ln/>
+        </p:spPr>
+        <p:txBody>
+          <a:bodyPr wrap="square" rtlCol="0" anchor="ctr"/>
+          <a:lstStyle/>
+          <a:p>
+            <a:pPr indent="0" marL="0">
+              <a:buNone/>
+            </a:pPr>
+            <a:endParaRPr lang="en-US" dirty="0"/>
+          </a:p>
+        </p:txBody>
+      </p:sp>
+      <p:sp>
+        <p:nvSpPr>
+          <p:cNvPr id="3" name="Text 1"/>
+          <p:cNvSpPr/>
+          <p:nvPr/>
+        </p:nvSpPr>
+        <p:spPr>
+          <a:xfrm>
+            <a:off x="406301" y="457051"/>
+            <a:ext cx="8498026" cy="274290"/>
+          </a:xfrm>
+          <a:prstGeom prst="rect">
+            <a:avLst/>
+          </a:prstGeom>
+          <a:noFill/>
+          <a:ln/>
+        </p:spPr>
+        <p:txBody>
+          <a:bodyPr wrap="square" lIns="0" tIns="0" rIns="0" bIns="0" rtlCol="0" anchor="t"/>
+          <a:lstStyle/>
+          <a:p>
+            <a:pPr algn="l" indent="0" marL="0">
+              <a:lnSpc>
+                <a:spcPts val="2160"/>
+              </a:lnSpc>
+              <a:spcBef>
+                <a:spcPts val="600"/>
+              </a:spcBef>
+              <a:spcAft>
+                <a:spcPts val="800"/>
+              </a:spcAft>
+              <a:buNone/>
+            </a:pPr>
+            <a:r>
+              <a:rPr lang="en-US" sz="1800" b="1" dirty="0">
+                <a:solidFill>
+                  <a:srgbClr val="E07A5F"/>
+                </a:solidFill>
+                <a:latin typeface="Georgia" pitchFamily="34" charset="0"/>
+                <a:ea typeface="Georgia" pitchFamily="34" charset="-122"/>
+                <a:cs typeface="Georgia" pitchFamily="34" charset="-120"/>
+              </a:rPr>
+              <a:t>Homework</a:t>
+            </a:r>
+            <a:endParaRPr lang="en-US" sz="1800" dirty="0"/>
+          </a:p>
+        </p:txBody>
+      </p:sp>
+      <p:sp>
+        <p:nvSpPr>
+          <p:cNvPr id="4" name="Text 2"/>
+          <p:cNvSpPr/>
+          <p:nvPr/>
+        </p:nvSpPr>
+        <p:spPr>
+          <a:xfrm>
+            <a:off x="634901" y="883593"/>
+            <a:ext cx="8102798" cy="310455"/>
+          </a:xfrm>
+          <a:prstGeom prst="rect">
+            <a:avLst/>
+          </a:prstGeom>
+          <a:noFill/>
+          <a:ln/>
+        </p:spPr>
+        <p:txBody>
+          <a:bodyPr wrap="square" lIns="0" tIns="0" rIns="0" bIns="0" rtlCol="0" anchor="t"/>
+          <a:lstStyle/>
+          <a:p>
+            <a:pPr algn="l" marL="342900" indent="-342900">
+              <a:lnSpc>
+                <a:spcPts val="1620"/>
+              </a:lnSpc>
+              <a:spcAft>
+                <a:spcPts val="300"/>
+              </a:spcAft>
+              <a:buSzPct val="100000"/>
+              <a:buChar char="•"/>
+            </a:pPr>
+            <a:r>
+              <a:rPr lang="en-US" sz="1200" dirty="0">
+                <a:solidFill>
+                  <a:srgbClr val="2C2C2C"/>
+                </a:solidFill>
+                <a:latin typeface="Verdana" pitchFamily="34" charset="0"/>
+                <a:ea typeface="Verdana" pitchFamily="34" charset="-122"/>
+                <a:cs typeface="Verdana" pitchFamily="34" charset="-120"/>
+              </a:rPr>
+              <a:t>Teach the finger trick to a parent or sibling. Multiply </a:t>
+            </a:r>
+            <a:pPr algn="l" indent="0" marL="0">
+              <a:lnSpc>
+                <a:spcPts val="1620"/>
+              </a:lnSpc>
+              <a:spcAft>
+                <a:spcPts val="300"/>
+              </a:spcAft>
+              <a:buNone/>
+            </a:pPr>
+            <a:r>
+              <a:rPr lang="en-US" sz="1200" dirty="0">
+                <a:solidFill>
+                  <a:srgbClr val="2C2C2C"/>
+                </a:solidFill>
+                <a:latin typeface="Verdana" pitchFamily="34" charset="0"/>
+                <a:ea typeface="Verdana" pitchFamily="34" charset="-122"/>
+                <a:cs typeface="Verdana" pitchFamily="34" charset="-120"/>
+              </a:rPr>
+              <a:t>7 × 8</a:t>
+            </a:r>
+            <a:pPr algn="l" indent="0" marL="0">
+              <a:lnSpc>
+                <a:spcPts val="1620"/>
+              </a:lnSpc>
+              <a:spcAft>
+                <a:spcPts val="300"/>
+              </a:spcAft>
+              <a:buNone/>
+            </a:pPr>
+            <a:r>
+              <a:rPr lang="en-US" sz="1200" dirty="0">
+                <a:solidFill>
+                  <a:srgbClr val="2C2C2C"/>
+                </a:solidFill>
+                <a:latin typeface="Verdana" pitchFamily="34" charset="0"/>
+                <a:ea typeface="Verdana" pitchFamily="34" charset="-122"/>
+                <a:cs typeface="Verdana" pitchFamily="34" charset="-120"/>
+              </a:rPr>
+              <a:t> together.</a:t>
+            </a:r>
+            <a:endParaRPr lang="en-US" sz="1200" dirty="0"/>
+          </a:p>
+        </p:txBody>
+      </p:sp>
+      <p:sp>
+        <p:nvSpPr>
+          <p:cNvPr id="5" name="Text 3"/>
+          <p:cNvSpPr/>
+          <p:nvPr/>
+        </p:nvSpPr>
+        <p:spPr>
+          <a:xfrm>
+            <a:off x="406301" y="4434929"/>
+            <a:ext cx="8498026" cy="213271"/>
+          </a:xfrm>
+          <a:prstGeom prst="rect">
+            <a:avLst/>
+          </a:prstGeom>
+          <a:noFill/>
+          <a:ln/>
+        </p:spPr>
+        <p:txBody>
+          <a:bodyPr wrap="square" lIns="0" tIns="0" rIns="0" bIns="0" rtlCol="0" anchor="t"/>
+          <a:lstStyle/>
+          <a:p>
+            <a:pPr algn="l" indent="0" marL="0">
+              <a:lnSpc>
+                <a:spcPts val="1680"/>
+              </a:lnSpc>
+              <a:spcBef>
+                <a:spcPts val="300"/>
+              </a:spcBef>
+              <a:spcAft>
+                <a:spcPts val="300"/>
+              </a:spcAft>
+              <a:buNone/>
+            </a:pPr>
+            <a:r>
+              <a:rPr lang="en-US" sz="1200" dirty="0">
+                <a:solidFill>
+                  <a:srgbClr val="2C2C2C"/>
+                </a:solidFill>
+                <a:latin typeface="Verdana" pitchFamily="34" charset="0"/>
+                <a:ea typeface="Verdana" pitchFamily="34" charset="-122"/>
+                <a:cs typeface="Verdana" pitchFamily="34" charset="-120"/>
+              </a:rPr>
+              <a:t>Primary ·  · IKS Curriculum</a:t>
+            </a:r>
+            <a:endParaRPr lang="en-US" sz="1200" dirty="0"/>
+          </a:p>
+        </p:txBody>
+      </p:sp>
+    </p:spTree>
+  </p:cSld>
+  <p:clrMapOvr>
+    <a:masterClrMapping/>
+  </p:clrMapOvr>
+</p:sld>
+</file>
+
+<file path=ppt/slides/slide14.xml><?xml version="1.0" encoding="utf-8"?>
+<p:sld xmlns:a="http://schemas.openxmlformats.org/drawingml/2006/main" xmlns:r="http://schemas.openxmlformats.org/officeDocument/2006/relationships" xmlns:p="http://schemas.openxmlformats.org/presentationml/2006/main">
+  <p:cSld name="Slide 14">
+    <p:bg>
+      <p:bgPr>
+        <a:solidFill>
+          <a:srgbClr val="FAF7F2"/>
+        </a:solidFill>
+      </p:bgPr>
+    </p:bg>
+    <p:spTree>
+      <p:nvGrpSpPr>
+        <p:cNvPr id="1" name=""/>
+        <p:cNvGrpSpPr/>
+        <p:nvPr/>
+      </p:nvGrpSpPr>
+      <p:grpSpPr>
+        <a:xfrm>
+          <a:off x="0" y="0"/>
+          <a:ext cx="0" cy="0"/>
+          <a:chOff x="0" y="0"/>
+          <a:chExt cx="0" cy="0"/>
+        </a:xfrm>
+      </p:grpSpPr>
+      <p:sp>
+        <p:nvSpPr>
+          <p:cNvPr id="2" name="Text 0"/>
+          <p:cNvSpPr/>
+          <p:nvPr/>
+        </p:nvSpPr>
+        <p:spPr>
+          <a:xfrm>
+            <a:off x="0" y="0"/>
+            <a:ext cx="9144000" cy="101501"/>
+          </a:xfrm>
+          <a:prstGeom prst="rect">
+            <a:avLst/>
+          </a:prstGeom>
+          <a:solidFill>
+            <a:srgbClr val="87A96B"/>
+          </a:solidFill>
+          <a:ln/>
+        </p:spPr>
+        <p:txBody>
+          <a:bodyPr wrap="square" rtlCol="0" anchor="ctr"/>
+          <a:lstStyle/>
+          <a:p>
+            <a:pPr indent="0" marL="0">
+              <a:buNone/>
+            </a:pPr>
+            <a:endParaRPr lang="en-US" dirty="0"/>
+          </a:p>
+        </p:txBody>
+      </p:sp>
+      <p:sp>
+        <p:nvSpPr>
+          <p:cNvPr id="3" name="Text 1"/>
+          <p:cNvSpPr/>
+          <p:nvPr/>
+        </p:nvSpPr>
+        <p:spPr>
+          <a:xfrm>
+            <a:off x="406301" y="457051"/>
+            <a:ext cx="8498026" cy="274290"/>
+          </a:xfrm>
+          <a:prstGeom prst="rect">
+            <a:avLst/>
+          </a:prstGeom>
+          <a:noFill/>
+          <a:ln/>
+        </p:spPr>
+        <p:txBody>
+          <a:bodyPr wrap="square" lIns="0" tIns="0" rIns="0" bIns="0" rtlCol="0" anchor="t"/>
+          <a:lstStyle/>
+          <a:p>
+            <a:pPr algn="l" indent="0" marL="0">
+              <a:lnSpc>
+                <a:spcPts val="2160"/>
+              </a:lnSpc>
+              <a:spcBef>
+                <a:spcPts val="600"/>
+              </a:spcBef>
+              <a:spcAft>
+                <a:spcPts val="800"/>
+              </a:spcAft>
+              <a:buNone/>
+            </a:pPr>
+            <a:r>
+              <a:rPr lang="en-US" sz="1800" b="1" dirty="0">
+                <a:solidFill>
+                  <a:srgbClr val="E07A5F"/>
+                </a:solidFill>
+                <a:latin typeface="Georgia" pitchFamily="34" charset="0"/>
+                <a:ea typeface="Georgia" pitchFamily="34" charset="-122"/>
+                <a:cs typeface="Georgia" pitchFamily="34" charset="-120"/>
+              </a:rPr>
+              <a:t>Differentiation</a:t>
+            </a:r>
+            <a:endParaRPr lang="en-US" sz="1800" dirty="0"/>
+          </a:p>
+        </p:txBody>
+      </p:sp>
+      <p:sp>
+        <p:nvSpPr>
+          <p:cNvPr id="4" name="Text 2"/>
+          <p:cNvSpPr/>
+          <p:nvPr/>
+        </p:nvSpPr>
+        <p:spPr>
+          <a:xfrm>
+            <a:off x="634901" y="883593"/>
+            <a:ext cx="8102798" cy="1022747"/>
+          </a:xfrm>
+          <a:prstGeom prst="rect">
+            <a:avLst/>
+          </a:prstGeom>
+          <a:noFill/>
+          <a:ln/>
+        </p:spPr>
+        <p:txBody>
+          <a:bodyPr wrap="square" lIns="0" tIns="0" rIns="0" bIns="0" rtlCol="0" anchor="t"/>
+          <a:lstStyle/>
+          <a:p>
+            <a:pPr algn="l" marL="342900" indent="-342900">
+              <a:lnSpc>
+                <a:spcPts val="1620"/>
+              </a:lnSpc>
+              <a:spcAft>
+                <a:spcPts val="300"/>
+              </a:spcAft>
+              <a:buSzPct val="100000"/>
+              <a:buChar char="•"/>
+            </a:pPr>
+            <a:r>
+              <a:rPr lang="en-US" sz="1200" b="1" dirty="0">
+                <a:solidFill>
+                  <a:srgbClr val="2C2C2C"/>
+                </a:solidFill>
+                <a:latin typeface="Verdana" pitchFamily="34" charset="0"/>
+                <a:ea typeface="Verdana" pitchFamily="34" charset="-122"/>
+                <a:cs typeface="Verdana" pitchFamily="34" charset="-120"/>
+              </a:rPr>
+              <a:t>Tier up:</a:t>
+            </a:r>
+            <a:pPr algn="l" indent="0" marL="0">
+              <a:lnSpc>
+                <a:spcPts val="1620"/>
+              </a:lnSpc>
+              <a:spcAft>
+                <a:spcPts val="300"/>
+              </a:spcAft>
+              <a:buNone/>
+            </a:pPr>
+            <a:r>
+              <a:rPr lang="en-US" sz="1200" dirty="0">
+                <a:solidFill>
+                  <a:srgbClr val="2C2C2C"/>
+                </a:solidFill>
+                <a:latin typeface="Verdana" pitchFamily="34" charset="0"/>
+                <a:ea typeface="Verdana" pitchFamily="34" charset="-122"/>
+                <a:cs typeface="Verdana" pitchFamily="34" charset="-120"/>
+              </a:rPr>
+              <a:t> Try </a:t>
+            </a:r>
+            <a:pPr algn="l" indent="0" marL="0">
+              <a:lnSpc>
+                <a:spcPts val="1620"/>
+              </a:lnSpc>
+              <a:spcAft>
+                <a:spcPts val="300"/>
+              </a:spcAft>
+              <a:buNone/>
+            </a:pPr>
+            <a:r>
+              <a:rPr lang="en-US" sz="1200" dirty="0">
+                <a:solidFill>
+                  <a:srgbClr val="2C2C2C"/>
+                </a:solidFill>
+                <a:latin typeface="Verdana" pitchFamily="34" charset="0"/>
+                <a:ea typeface="Verdana" pitchFamily="34" charset="-122"/>
+                <a:cs typeface="Verdana" pitchFamily="34" charset="-120"/>
+              </a:rPr>
+              <a:t>5 × 6</a:t>
+            </a:r>
+            <a:pPr algn="l" indent="0" marL="0">
+              <a:lnSpc>
+                <a:spcPts val="1620"/>
+              </a:lnSpc>
+              <a:spcAft>
+                <a:spcPts val="300"/>
+              </a:spcAft>
+              <a:buNone/>
+            </a:pPr>
+            <a:r>
+              <a:rPr lang="en-US" sz="1200" dirty="0">
+                <a:solidFill>
+                  <a:srgbClr val="2C2C2C"/>
+                </a:solidFill>
+                <a:latin typeface="Verdana" pitchFamily="34" charset="0"/>
+                <a:ea typeface="Verdana" pitchFamily="34" charset="-122"/>
+                <a:cs typeface="Verdana" pitchFamily="34" charset="-120"/>
+              </a:rPr>
+              <a:t> — what does the trick give? (5: 0 down, 5 up. 6: 1 down, 4 up. Down sum 1 → 10. Up product 5×4 = 20. Total 30. ✓) Notice: works for 5+ too. What about </a:t>
+            </a:r>
+            <a:pPr algn="l" indent="0" marL="0">
+              <a:lnSpc>
+                <a:spcPts val="1620"/>
+              </a:lnSpc>
+              <a:spcAft>
+                <a:spcPts val="300"/>
+              </a:spcAft>
+              <a:buNone/>
+            </a:pPr>
+            <a:r>
+              <a:rPr lang="en-US" sz="1200" dirty="0">
+                <a:solidFill>
+                  <a:srgbClr val="2C2C2C"/>
+                </a:solidFill>
+                <a:latin typeface="Verdana" pitchFamily="34" charset="0"/>
+                <a:ea typeface="Verdana" pitchFamily="34" charset="-122"/>
+                <a:cs typeface="Verdana" pitchFamily="34" charset="-120"/>
+              </a:rPr>
+              <a:t>5 × 5</a:t>
+            </a:r>
+            <a:pPr algn="l" indent="0" marL="0">
+              <a:lnSpc>
+                <a:spcPts val="1620"/>
+              </a:lnSpc>
+              <a:spcAft>
+                <a:spcPts val="300"/>
+              </a:spcAft>
+              <a:buNone/>
+            </a:pPr>
+            <a:r>
+              <a:rPr lang="en-US" sz="1200" dirty="0">
+                <a:solidFill>
+                  <a:srgbClr val="2C2C2C"/>
+                </a:solidFill>
+                <a:latin typeface="Verdana" pitchFamily="34" charset="0"/>
+                <a:ea typeface="Verdana" pitchFamily="34" charset="-122"/>
+                <a:cs typeface="Verdana" pitchFamily="34" charset="-120"/>
+              </a:rPr>
+              <a:t>? (Both 0 down. Down sum 0. Up product 5×5 = 25. ✓ Total 25.) Cool — works for 5 too.</a:t>
+            </a:r>
+            <a:endParaRPr lang="en-US" sz="1200" dirty="0"/>
+          </a:p>
+          <a:p>
+            <a:pPr algn="l" marL="342900" indent="-342900">
+              <a:lnSpc>
+                <a:spcPts val="1620"/>
+              </a:lnSpc>
+              <a:spcAft>
+                <a:spcPts val="300"/>
+              </a:spcAft>
+              <a:buSzPct val="100000"/>
+              <a:buChar char="•"/>
+            </a:pPr>
+            <a:r>
+              <a:rPr lang="en-US" sz="1200" b="1" dirty="0">
+                <a:solidFill>
+                  <a:srgbClr val="2C2C2C"/>
+                </a:solidFill>
+                <a:latin typeface="Verdana" pitchFamily="34" charset="0"/>
+                <a:ea typeface="Verdana" pitchFamily="34" charset="-122"/>
+                <a:cs typeface="Verdana" pitchFamily="34" charset="-120"/>
+              </a:rPr>
+              <a:t>Tier down:</a:t>
+            </a:r>
+            <a:pPr algn="l" indent="0" marL="0">
+              <a:lnSpc>
+                <a:spcPts val="1620"/>
+              </a:lnSpc>
+              <a:spcAft>
+                <a:spcPts val="300"/>
+              </a:spcAft>
+              <a:buNone/>
+            </a:pPr>
+            <a:r>
+              <a:rPr lang="en-US" sz="1200" dirty="0">
+                <a:solidFill>
+                  <a:srgbClr val="2C2C2C"/>
+                </a:solidFill>
+                <a:latin typeface="Verdana" pitchFamily="34" charset="0"/>
+                <a:ea typeface="Verdana" pitchFamily="34" charset="-122"/>
+                <a:cs typeface="Verdana" pitchFamily="34" charset="-120"/>
+              </a:rPr>
+              <a:t> Stay with </a:t>
+            </a:r>
+            <a:pPr algn="l" indent="0" marL="0">
+              <a:lnSpc>
+                <a:spcPts val="1620"/>
+              </a:lnSpc>
+              <a:spcAft>
+                <a:spcPts val="300"/>
+              </a:spcAft>
+              <a:buNone/>
+            </a:pPr>
+            <a:r>
+              <a:rPr lang="en-US" sz="1200" dirty="0">
+                <a:solidFill>
+                  <a:srgbClr val="2C2C2C"/>
+                </a:solidFill>
+                <a:latin typeface="Verdana" pitchFamily="34" charset="0"/>
+                <a:ea typeface="Verdana" pitchFamily="34" charset="-122"/>
+                <a:cs typeface="Verdana" pitchFamily="34" charset="-120"/>
+              </a:rPr>
+              <a:t>7 × 8</a:t>
+            </a:r>
+            <a:pPr algn="l" indent="0" marL="0">
+              <a:lnSpc>
+                <a:spcPts val="1620"/>
+              </a:lnSpc>
+              <a:spcAft>
+                <a:spcPts val="300"/>
+              </a:spcAft>
+              <a:buNone/>
+            </a:pPr>
+            <a:r>
+              <a:rPr lang="en-US" sz="1200" dirty="0">
+                <a:solidFill>
+                  <a:srgbClr val="2C2C2C"/>
+                </a:solidFill>
+                <a:latin typeface="Verdana" pitchFamily="34" charset="0"/>
+                <a:ea typeface="Verdana" pitchFamily="34" charset="-122"/>
+                <a:cs typeface="Verdana" pitchFamily="34" charset="-120"/>
+              </a:rPr>
+              <a:t> and </a:t>
+            </a:r>
+            <a:pPr algn="l" indent="0" marL="0">
+              <a:lnSpc>
+                <a:spcPts val="1620"/>
+              </a:lnSpc>
+              <a:spcAft>
+                <a:spcPts val="300"/>
+              </a:spcAft>
+              <a:buNone/>
+            </a:pPr>
+            <a:r>
+              <a:rPr lang="en-US" sz="1200" dirty="0">
+                <a:solidFill>
+                  <a:srgbClr val="2C2C2C"/>
+                </a:solidFill>
+                <a:latin typeface="Verdana" pitchFamily="34" charset="0"/>
+                <a:ea typeface="Verdana" pitchFamily="34" charset="-122"/>
+                <a:cs typeface="Verdana" pitchFamily="34" charset="-120"/>
+              </a:rPr>
+              <a:t>9 × 9</a:t>
+            </a:r>
+            <a:pPr algn="l" indent="0" marL="0">
+              <a:lnSpc>
+                <a:spcPts val="1620"/>
+              </a:lnSpc>
+              <a:spcAft>
+                <a:spcPts val="300"/>
+              </a:spcAft>
+              <a:buNone/>
+            </a:pPr>
+            <a:r>
+              <a:rPr lang="en-US" sz="1200" dirty="0">
+                <a:solidFill>
+                  <a:srgbClr val="2C2C2C"/>
+                </a:solidFill>
+                <a:latin typeface="Verdana" pitchFamily="34" charset="0"/>
+                <a:ea typeface="Verdana" pitchFamily="34" charset="-122"/>
+                <a:cs typeface="Verdana" pitchFamily="34" charset="-120"/>
+              </a:rPr>
+              <a:t> until comfortable. Don't push variety today.</a:t>
+            </a:r>
+            <a:endParaRPr lang="en-US" sz="1200" dirty="0"/>
+          </a:p>
+        </p:txBody>
+      </p:sp>
+      <p:sp>
+        <p:nvSpPr>
+          <p:cNvPr id="5" name="Text 3"/>
+          <p:cNvSpPr/>
+          <p:nvPr/>
+        </p:nvSpPr>
+        <p:spPr>
+          <a:xfrm>
+            <a:off x="406301" y="4434929"/>
+            <a:ext cx="8498026" cy="213271"/>
+          </a:xfrm>
+          <a:prstGeom prst="rect">
+            <a:avLst/>
+          </a:prstGeom>
+          <a:noFill/>
+          <a:ln/>
+        </p:spPr>
+        <p:txBody>
+          <a:bodyPr wrap="square" lIns="0" tIns="0" rIns="0" bIns="0" rtlCol="0" anchor="t"/>
+          <a:lstStyle/>
+          <a:p>
+            <a:pPr algn="l" indent="0" marL="0">
+              <a:lnSpc>
+                <a:spcPts val="1680"/>
+              </a:lnSpc>
+              <a:spcBef>
+                <a:spcPts val="300"/>
+              </a:spcBef>
+              <a:spcAft>
+                <a:spcPts val="300"/>
+              </a:spcAft>
+              <a:buNone/>
+            </a:pPr>
+            <a:r>
+              <a:rPr lang="en-US" sz="1200" dirty="0">
+                <a:solidFill>
+                  <a:srgbClr val="2C2C2C"/>
+                </a:solidFill>
+                <a:latin typeface="Verdana" pitchFamily="34" charset="0"/>
+                <a:ea typeface="Verdana" pitchFamily="34" charset="-122"/>
+                <a:cs typeface="Verdana" pitchFamily="34" charset="-120"/>
+              </a:rPr>
+              <a:t>Primary ·  · IKS Curriculum</a:t>
+            </a:r>
+            <a:endParaRPr lang="en-US" sz="1200" dirty="0"/>
+          </a:p>
+        </p:txBody>
+      </p:sp>
+    </p:spTree>
+  </p:cSld>
+  <p:clrMapOvr>
+    <a:masterClrMapping/>
+  </p:clrMapOvr>
+</p:sld>
+</file>
+
+<file path=ppt/slides/slide15.xml><?xml version="1.0" encoding="utf-8"?>
+<p:sld xmlns:a="http://schemas.openxmlformats.org/drawingml/2006/main" xmlns:r="http://schemas.openxmlformats.org/officeDocument/2006/relationships" xmlns:p="http://schemas.openxmlformats.org/presentationml/2006/main">
+  <p:cSld name="Slide 15">
+    <p:bg>
+      <p:bgPr>
+        <a:solidFill>
+          <a:srgbClr val="FAF7F2"/>
+        </a:solidFill>
+      </p:bgPr>
+    </p:bg>
+    <p:spTree>
+      <p:nvGrpSpPr>
+        <p:cNvPr id="1" name=""/>
+        <p:cNvGrpSpPr/>
+        <p:nvPr/>
+      </p:nvGrpSpPr>
+      <p:grpSpPr>
+        <a:xfrm>
+          <a:off x="0" y="0"/>
+          <a:ext cx="0" cy="0"/>
+          <a:chOff x="0" y="0"/>
+          <a:chExt cx="0" cy="0"/>
+        </a:xfrm>
+      </p:grpSpPr>
+      <p:sp>
+        <p:nvSpPr>
+          <p:cNvPr id="2" name="Text 0"/>
+          <p:cNvSpPr/>
+          <p:nvPr/>
+        </p:nvSpPr>
+        <p:spPr>
+          <a:xfrm>
+            <a:off x="0" y="0"/>
+            <a:ext cx="9144000" cy="101501"/>
+          </a:xfrm>
+          <a:prstGeom prst="rect">
+            <a:avLst/>
+          </a:prstGeom>
+          <a:solidFill>
+            <a:srgbClr val="87A96B"/>
+          </a:solidFill>
+          <a:ln/>
+        </p:spPr>
+        <p:txBody>
+          <a:bodyPr wrap="square" rtlCol="0" anchor="ctr"/>
+          <a:lstStyle/>
+          <a:p>
+            <a:pPr indent="0" marL="0">
+              <a:buNone/>
+            </a:pPr>
+            <a:endParaRPr lang="en-US" dirty="0"/>
+          </a:p>
+        </p:txBody>
+      </p:sp>
+      <p:sp>
+        <p:nvSpPr>
+          <p:cNvPr id="3" name="Text 1"/>
+          <p:cNvSpPr/>
+          <p:nvPr/>
+        </p:nvSpPr>
+        <p:spPr>
+          <a:xfrm>
+            <a:off x="406301" y="457051"/>
+            <a:ext cx="8498026" cy="274290"/>
+          </a:xfrm>
+          <a:prstGeom prst="rect">
+            <a:avLst/>
+          </a:prstGeom>
+          <a:noFill/>
+          <a:ln/>
+        </p:spPr>
+        <p:txBody>
+          <a:bodyPr wrap="square" lIns="0" tIns="0" rIns="0" bIns="0" rtlCol="0" anchor="t"/>
+          <a:lstStyle/>
+          <a:p>
+            <a:pPr algn="l" indent="0" marL="0">
+              <a:lnSpc>
+                <a:spcPts val="2160"/>
+              </a:lnSpc>
+              <a:spcBef>
+                <a:spcPts val="600"/>
+              </a:spcBef>
+              <a:spcAft>
+                <a:spcPts val="800"/>
+              </a:spcAft>
+              <a:buNone/>
+            </a:pPr>
+            <a:r>
+              <a:rPr lang="en-US" sz="1800" b="1" dirty="0">
+                <a:solidFill>
+                  <a:srgbClr val="E07A5F"/>
+                </a:solidFill>
+                <a:latin typeface="Georgia" pitchFamily="34" charset="0"/>
+                <a:ea typeface="Georgia" pitchFamily="34" charset="-122"/>
+                <a:cs typeface="Georgia" pitchFamily="34" charset="-120"/>
+              </a:rPr>
+              <a:t>Teacher's quick notes</a:t>
+            </a:r>
+            <a:endParaRPr lang="en-US" sz="1800" dirty="0"/>
+          </a:p>
+        </p:txBody>
+      </p:sp>
+      <p:sp>
+        <p:nvSpPr>
+          <p:cNvPr id="4" name="Text 2"/>
+          <p:cNvSpPr/>
+          <p:nvPr/>
+        </p:nvSpPr>
+        <p:spPr>
+          <a:xfrm>
+            <a:off x="634901" y="883593"/>
+            <a:ext cx="8102798" cy="1180802"/>
+          </a:xfrm>
+          <a:prstGeom prst="rect">
+            <a:avLst/>
+          </a:prstGeom>
+          <a:noFill/>
+          <a:ln/>
+        </p:spPr>
+        <p:txBody>
+          <a:bodyPr wrap="square" lIns="0" tIns="0" rIns="0" bIns="0" rtlCol="0" anchor="t"/>
+          <a:lstStyle/>
+          <a:p>
+            <a:pPr algn="l" marL="342900" indent="-342900">
+              <a:lnSpc>
+                <a:spcPts val="1620"/>
+              </a:lnSpc>
+              <a:spcAft>
+                <a:spcPts val="300"/>
+              </a:spcAft>
+              <a:buSzPct val="100000"/>
+              <a:buChar char="•"/>
+            </a:pPr>
+            <a:r>
+              <a:rPr lang="en-US" sz="1200" dirty="0">
+                <a:solidFill>
+                  <a:srgbClr val="2C2C2C"/>
+                </a:solidFill>
+                <a:latin typeface="Verdana" pitchFamily="34" charset="0"/>
+                <a:ea typeface="Verdana" pitchFamily="34" charset="-122"/>
+                <a:cs typeface="Verdana" pitchFamily="34" charset="-120"/>
+              </a:rPr>
+              <a:t>A few children will have trouble keeping track of "down vs up." Slow down with them; the trick </a:t>
+            </a:r>
+            <a:pPr algn="l" indent="0" marL="0">
+              <a:lnSpc>
+                <a:spcPts val="1620"/>
+              </a:lnSpc>
+              <a:spcAft>
+                <a:spcPts val="300"/>
+              </a:spcAft>
+              <a:buNone/>
+            </a:pPr>
+            <a:r>
+              <a:rPr lang="en-US" sz="1200" i="1" dirty="0">
+                <a:solidFill>
+                  <a:srgbClr val="2C2C2C"/>
+                </a:solidFill>
+                <a:latin typeface="Verdana" pitchFamily="34" charset="0"/>
+                <a:ea typeface="Verdana" pitchFamily="34" charset="-122"/>
+                <a:cs typeface="Verdana" pitchFamily="34" charset="-120"/>
+              </a:rPr>
+              <a:t>is</a:t>
+            </a:r>
+            <a:pPr algn="l" indent="0" marL="0">
+              <a:lnSpc>
+                <a:spcPts val="1620"/>
+              </a:lnSpc>
+              <a:spcAft>
+                <a:spcPts val="300"/>
+              </a:spcAft>
+              <a:buNone/>
+            </a:pPr>
+            <a:r>
+              <a:rPr lang="en-US" sz="1200" dirty="0">
+                <a:solidFill>
+                  <a:srgbClr val="2C2C2C"/>
+                </a:solidFill>
+                <a:latin typeface="Verdana" pitchFamily="34" charset="0"/>
+                <a:ea typeface="Verdana" pitchFamily="34" charset="-122"/>
+                <a:cs typeface="Verdana" pitchFamily="34" charset="-120"/>
+              </a:rPr>
+              <a:t> tricky on the first day.</a:t>
+            </a:r>
+            <a:endParaRPr lang="en-US" sz="1200" dirty="0"/>
+          </a:p>
+          <a:p>
+            <a:pPr algn="l" marL="342900" indent="-342900">
+              <a:lnSpc>
+                <a:spcPts val="1620"/>
+              </a:lnSpc>
+              <a:spcAft>
+                <a:spcPts val="300"/>
+              </a:spcAft>
+              <a:buSzPct val="100000"/>
+              <a:buChar char="•"/>
+            </a:pPr>
+            <a:r>
+              <a:rPr lang="en-US" sz="1200" dirty="0">
+                <a:solidFill>
+                  <a:srgbClr val="2C2C2C"/>
+                </a:solidFill>
+                <a:latin typeface="Verdana" pitchFamily="34" charset="0"/>
+                <a:ea typeface="Verdana" pitchFamily="34" charset="-122"/>
+                <a:cs typeface="Verdana" pitchFamily="34" charset="-120"/>
+              </a:rPr>
+              <a:t>Some children will object: "I already know my 7 times table." Honest response: </a:t>
+            </a:r>
+            <a:pPr algn="l" indent="0" marL="0">
+              <a:lnSpc>
+                <a:spcPts val="1620"/>
+              </a:lnSpc>
+              <a:spcAft>
+                <a:spcPts val="300"/>
+              </a:spcAft>
+              <a:buNone/>
+            </a:pPr>
+            <a:r>
+              <a:rPr lang="en-US" sz="1200" i="1" dirty="0">
+                <a:solidFill>
+                  <a:srgbClr val="2C2C2C"/>
+                </a:solidFill>
+                <a:latin typeface="Verdana" pitchFamily="34" charset="0"/>
+                <a:ea typeface="Verdana" pitchFamily="34" charset="-122"/>
+                <a:cs typeface="Verdana" pitchFamily="34" charset="-120"/>
+              </a:rPr>
+              <a:t>"Great! Now you have TWO ways of finding the answer."</a:t>
+            </a:r>
+            <a:endParaRPr lang="en-US" sz="1200" dirty="0"/>
+          </a:p>
+          <a:p>
+            <a:pPr algn="l" marL="342900" indent="-342900">
+              <a:lnSpc>
+                <a:spcPts val="1620"/>
+              </a:lnSpc>
+              <a:spcAft>
+                <a:spcPts val="300"/>
+              </a:spcAft>
+              <a:buSzPct val="100000"/>
+              <a:buChar char="•"/>
+            </a:pPr>
+            <a:r>
+              <a:rPr lang="en-US" sz="1200" dirty="0">
+                <a:solidFill>
+                  <a:srgbClr val="2C2C2C"/>
+                </a:solidFill>
+                <a:latin typeface="Verdana" pitchFamily="34" charset="0"/>
+                <a:ea typeface="Verdana" pitchFamily="34" charset="-122"/>
+                <a:cs typeface="Verdana" pitchFamily="34" charset="-120"/>
+              </a:rPr>
+              <a:t>Don't explain why it works today. Day 4 is the dot-drawing day.</a:t>
+            </a:r>
+            <a:endParaRPr lang="en-US" sz="1200" dirty="0"/>
+          </a:p>
+        </p:txBody>
+      </p:sp>
+      <p:sp>
+        <p:nvSpPr>
+          <p:cNvPr id="5" name="Text 3"/>
+          <p:cNvSpPr/>
+          <p:nvPr/>
+        </p:nvSpPr>
+        <p:spPr>
+          <a:xfrm>
+            <a:off x="406301" y="4434929"/>
+            <a:ext cx="8498026" cy="213271"/>
+          </a:xfrm>
+          <a:prstGeom prst="rect">
+            <a:avLst/>
+          </a:prstGeom>
+          <a:noFill/>
+          <a:ln/>
+        </p:spPr>
+        <p:txBody>
+          <a:bodyPr wrap="square" lIns="0" tIns="0" rIns="0" bIns="0" rtlCol="0" anchor="t"/>
+          <a:lstStyle/>
+          <a:p>
+            <a:pPr algn="l" indent="0" marL="0">
+              <a:lnSpc>
+                <a:spcPts val="1680"/>
+              </a:lnSpc>
+              <a:spcBef>
+                <a:spcPts val="300"/>
+              </a:spcBef>
+              <a:spcAft>
+                <a:spcPts val="300"/>
+              </a:spcAft>
+              <a:buNone/>
+            </a:pPr>
+            <a:r>
+              <a:rPr lang="en-US" sz="1200" dirty="0">
+                <a:solidFill>
+                  <a:srgbClr val="2C2C2C"/>
+                </a:solidFill>
+                <a:latin typeface="Verdana" pitchFamily="34" charset="0"/>
+                <a:ea typeface="Verdana" pitchFamily="34" charset="-122"/>
+                <a:cs typeface="Verdana" pitchFamily="34" charset="-120"/>
+              </a:rPr>
+              <a:t>Primary ·  · IKS Curriculum</a:t>
+            </a:r>
+            <a:endParaRPr lang="en-US" sz="1200" dirty="0"/>
+          </a:p>
+        </p:txBody>
+      </p:sp>
+    </p:spTree>
+  </p:cSld>
+  <p:clrMapOvr>
+    <a:masterClrMapping/>
+  </p:clrMapOvr>
+</p:sld>
+</file>
+
+<file path=ppt/slides/slide16.xml><?xml version="1.0" encoding="utf-8"?>
+<p:sld xmlns:a="http://schemas.openxmlformats.org/drawingml/2006/main" xmlns:r="http://schemas.openxmlformats.org/officeDocument/2006/relationships" xmlns:p="http://schemas.openxmlformats.org/presentationml/2006/main">
+  <p:cSld name="Slide 16">
+    <p:bg>
+      <p:bgPr>
+        <a:solidFill>
+          <a:srgbClr val="FAF7F2"/>
+        </a:solidFill>
+      </p:bgPr>
+    </p:bg>
+    <p:spTree>
+      <p:nvGrpSpPr>
+        <p:cNvPr id="1" name=""/>
+        <p:cNvGrpSpPr/>
+        <p:nvPr/>
+      </p:nvGrpSpPr>
+      <p:grpSpPr>
+        <a:xfrm>
+          <a:off x="0" y="0"/>
+          <a:ext cx="0" cy="0"/>
+          <a:chOff x="0" y="0"/>
+          <a:chExt cx="0" cy="0"/>
+        </a:xfrm>
+      </p:grpSpPr>
+      <p:sp>
+        <p:nvSpPr>
+          <p:cNvPr id="2" name="Text 0"/>
+          <p:cNvSpPr/>
+          <p:nvPr/>
+        </p:nvSpPr>
+        <p:spPr>
+          <a:xfrm>
+            <a:off x="0" y="0"/>
+            <a:ext cx="9144000" cy="101501"/>
+          </a:xfrm>
+          <a:prstGeom prst="rect">
+            <a:avLst/>
+          </a:prstGeom>
+          <a:solidFill>
+            <a:srgbClr val="87A96B"/>
+          </a:solidFill>
+          <a:ln/>
+        </p:spPr>
+        <p:txBody>
+          <a:bodyPr wrap="square" rtlCol="0" anchor="ctr"/>
+          <a:lstStyle/>
+          <a:p>
+            <a:pPr indent="0" marL="0">
+              <a:buNone/>
+            </a:pPr>
+            <a:endParaRPr lang="en-US" dirty="0"/>
+          </a:p>
+        </p:txBody>
+      </p:sp>
+      <p:sp>
+        <p:nvSpPr>
+          <p:cNvPr id="3" name="Text 1"/>
+          <p:cNvSpPr/>
+          <p:nvPr/>
+        </p:nvSpPr>
+        <p:spPr>
+          <a:xfrm>
+            <a:off x="406301" y="457051"/>
+            <a:ext cx="8498026" cy="274290"/>
+          </a:xfrm>
+          <a:prstGeom prst="rect">
+            <a:avLst/>
+          </a:prstGeom>
+          <a:noFill/>
+          <a:ln/>
+        </p:spPr>
+        <p:txBody>
+          <a:bodyPr wrap="square" lIns="0" tIns="0" rIns="0" bIns="0" rtlCol="0" anchor="t"/>
+          <a:lstStyle/>
+          <a:p>
+            <a:pPr algn="l" indent="0" marL="0">
+              <a:lnSpc>
+                <a:spcPts val="2160"/>
+              </a:lnSpc>
+              <a:spcBef>
+                <a:spcPts val="600"/>
+              </a:spcBef>
+              <a:spcAft>
+                <a:spcPts val="800"/>
+              </a:spcAft>
+              <a:buNone/>
+            </a:pPr>
+            <a:r>
+              <a:rPr lang="en-US" sz="1800" b="1" dirty="0">
+                <a:solidFill>
+                  <a:srgbClr val="E07A5F"/>
+                </a:solidFill>
+                <a:latin typeface="Georgia" pitchFamily="34" charset="0"/>
+                <a:ea typeface="Georgia" pitchFamily="34" charset="-122"/>
+                <a:cs typeface="Georgia" pitchFamily="34" charset="-120"/>
+              </a:rPr>
               <a:t>Sanskrit term mention</a:t>
             </a:r>
             <a:endParaRPr lang="en-US" sz="1800" dirty="0"/>
@@ -2322,7 +4716,7 @@
                 <a:ea typeface="Georgia" pitchFamily="34" charset="-122"/>
                 <a:cs typeface="Georgia" pitchFamily="34" charset="-120"/>
               </a:rPr>
-              <a:t>Materials</a:t>
+              <a:t>Goal</a:t>
             </a:r>
             <a:endParaRPr lang="en-US" sz="1800" dirty="0"/>
           </a:p>
@@ -2337,7 +4731,7 @@
         <p:spPr>
           <a:xfrm>
             <a:off x="406301" y="870942"/>
-            <a:ext cx="8498026" cy="464641"/>
+            <a:ext cx="8498026" cy="213271"/>
           </a:xfrm>
           <a:prstGeom prst="rect">
             <a:avLst/>
@@ -2370,53 +4764,7 @@
                 <a:ea typeface="Verdana" pitchFamily="34" charset="-122"/>
                 <a:cs typeface="Verdana" pitchFamily="34" charset="-120"/>
               </a:rPr>
-              <a:t>– Both hands (everyone has them). – Class wall-poster: a hand diagram showing fingers folded down for </a:t>
-            </a:r>
-            <a:pPr algn="l" indent="0" marL="0">
-              <a:lnSpc>
-                <a:spcPts val="1680"/>
-              </a:lnSpc>
-              <a:spcBef>
-                <a:spcPts val="300"/>
-              </a:spcBef>
-              <a:spcAft>
-                <a:spcPts val="300"/>
-              </a:spcAft>
-              <a:buNone/>
-            </a:pPr>
-            <a:r>
-              <a:rPr lang="en-US" sz="1200" dirty="0">
-                <a:solidFill>
-                  <a:srgbClr val="2C2C2C"/>
-                </a:solidFill>
-                <a:latin typeface="Verdana" pitchFamily="34" charset="0"/>
-                <a:ea typeface="Verdana" pitchFamily="34" charset="-122"/>
-                <a:cs typeface="Verdana" pitchFamily="34" charset="-120"/>
-              </a:rPr>
-              <a:t>7 × 8</a:t>
-            </a:r>
-            <a:pPr algn="l" indent="0" marL="0">
-              <a:lnSpc>
-                <a:spcPts val="1680"/>
-              </a:lnSpc>
-              <a:spcBef>
-                <a:spcPts val="300"/>
-              </a:spcBef>
-              <a:spcAft>
-                <a:spcPts val="300"/>
-              </a:spcAft>
-              <a:buNone/>
-            </a:pPr>
-            <a:r>
-              <a:rPr lang="en-US" sz="1200" dirty="0">
-                <a:solidFill>
-                  <a:srgbClr val="2C2C2C"/>
-                </a:solidFill>
-                <a:latin typeface="Verdana" pitchFamily="34" charset="0"/>
-                <a:ea typeface="Verdana" pitchFamily="34" charset="-122"/>
-                <a:cs typeface="Verdana" pitchFamily="34" charset="-120"/>
-              </a:rPr>
-              <a:t>. – Worksheet: 16 problems (all combinations 6×6 through 9×9), with hand-diagram answer key.</a:t>
+              <a:t>Children learn the hand-multiplication trick for any pair from 6 to 9.</a:t>
             </a:r>
             <a:endParaRPr lang="en-US" sz="1200" dirty="0"/>
           </a:p>
@@ -2574,7 +4922,7 @@
                 <a:ea typeface="Georgia" pitchFamily="34" charset="-122"/>
                 <a:cs typeface="Georgia" pitchFamily="34" charset="-120"/>
               </a:rPr>
-              <a:t>The flow</a:t>
+              <a:t>Materials</a:t>
             </a:r>
             <a:endParaRPr lang="en-US" sz="1800" dirty="0"/>
           </a:p>
@@ -2583,6 +4931,140 @@
       <p:sp>
         <p:nvSpPr>
           <p:cNvPr id="4" name="Text 2"/>
+          <p:cNvSpPr/>
+          <p:nvPr/>
+        </p:nvSpPr>
+        <p:spPr>
+          <a:xfrm>
+            <a:off x="634901" y="883593"/>
+            <a:ext cx="8102798" cy="798016"/>
+          </a:xfrm>
+          <a:prstGeom prst="rect">
+            <a:avLst/>
+          </a:prstGeom>
+          <a:noFill/>
+          <a:ln/>
+        </p:spPr>
+        <p:txBody>
+          <a:bodyPr wrap="square" lIns="0" tIns="0" rIns="0" bIns="0" rtlCol="0" anchor="t"/>
+          <a:lstStyle/>
+          <a:p>
+            <a:pPr algn="l" marL="342900" indent="-342900">
+              <a:lnSpc>
+                <a:spcPts val="1620"/>
+              </a:lnSpc>
+              <a:spcAft>
+                <a:spcPts val="300"/>
+              </a:spcAft>
+              <a:buSzPct val="100000"/>
+              <a:buChar char="•"/>
+            </a:pPr>
+            <a:r>
+              <a:rPr lang="en-US" sz="1200" dirty="0">
+                <a:solidFill>
+                  <a:srgbClr val="2C2C2C"/>
+                </a:solidFill>
+                <a:latin typeface="Verdana" pitchFamily="34" charset="0"/>
+                <a:ea typeface="Verdana" pitchFamily="34" charset="-122"/>
+                <a:cs typeface="Verdana" pitchFamily="34" charset="-120"/>
+              </a:rPr>
+              <a:t>Both hands (everyone has them).</a:t>
+            </a:r>
+            <a:endParaRPr lang="en-US" sz="1200" dirty="0"/>
+          </a:p>
+          <a:p>
+            <a:pPr algn="l" marL="342900" indent="-342900">
+              <a:lnSpc>
+                <a:spcPts val="1620"/>
+              </a:lnSpc>
+              <a:spcAft>
+                <a:spcPts val="300"/>
+              </a:spcAft>
+              <a:buSzPct val="100000"/>
+              <a:buChar char="•"/>
+            </a:pPr>
+            <a:r>
+              <a:rPr lang="en-US" sz="1200" dirty="0">
+                <a:solidFill>
+                  <a:srgbClr val="2C2C2C"/>
+                </a:solidFill>
+                <a:latin typeface="Verdana" pitchFamily="34" charset="0"/>
+                <a:ea typeface="Verdana" pitchFamily="34" charset="-122"/>
+                <a:cs typeface="Verdana" pitchFamily="34" charset="-120"/>
+              </a:rPr>
+              <a:t>Class wall-poster: a hand diagram showing fingers folded down for </a:t>
+            </a:r>
+            <a:pPr algn="l" indent="0" marL="0">
+              <a:lnSpc>
+                <a:spcPts val="1620"/>
+              </a:lnSpc>
+              <a:spcAft>
+                <a:spcPts val="300"/>
+              </a:spcAft>
+              <a:buNone/>
+            </a:pPr>
+            <a:r>
+              <a:rPr lang="en-US" sz="1200" dirty="0">
+                <a:solidFill>
+                  <a:srgbClr val="2C2C2C"/>
+                </a:solidFill>
+                <a:latin typeface="Verdana" pitchFamily="34" charset="0"/>
+                <a:ea typeface="Verdana" pitchFamily="34" charset="-122"/>
+                <a:cs typeface="Verdana" pitchFamily="34" charset="-120"/>
+              </a:rPr>
+              <a:t>7 × 8</a:t>
+            </a:r>
+            <a:pPr algn="l" indent="0" marL="0">
+              <a:lnSpc>
+                <a:spcPts val="1620"/>
+              </a:lnSpc>
+              <a:spcAft>
+                <a:spcPts val="300"/>
+              </a:spcAft>
+              <a:buNone/>
+            </a:pPr>
+            <a:r>
+              <a:rPr lang="en-US" sz="1200" dirty="0">
+                <a:solidFill>
+                  <a:srgbClr val="2C2C2C"/>
+                </a:solidFill>
+                <a:latin typeface="Verdana" pitchFamily="34" charset="0"/>
+                <a:ea typeface="Verdana" pitchFamily="34" charset="-122"/>
+                <a:cs typeface="Verdana" pitchFamily="34" charset="-120"/>
+              </a:rPr>
+              <a:t>.</a:t>
+            </a:r>
+            <a:endParaRPr lang="en-US" sz="1200" dirty="0"/>
+          </a:p>
+          <a:p>
+            <a:pPr algn="l" marL="342900" indent="-342900">
+              <a:lnSpc>
+                <a:spcPts val="1620"/>
+              </a:lnSpc>
+              <a:spcAft>
+                <a:spcPts val="300"/>
+              </a:spcAft>
+              <a:buSzPct val="100000"/>
+              <a:buChar char="•"/>
+            </a:pPr>
+            <a:r>
+              <a:rPr lang="en-US" sz="1200" dirty="0">
+                <a:solidFill>
+                  <a:srgbClr val="2C2C2C"/>
+                </a:solidFill>
+                <a:latin typeface="Verdana" pitchFamily="34" charset="0"/>
+                <a:ea typeface="Verdana" pitchFamily="34" charset="-122"/>
+                <a:cs typeface="Verdana" pitchFamily="34" charset="-120"/>
+              </a:rPr>
+              <a:t>Worksheet: 16 problems (all combinations 6×6 through 9×9), with hand-diagram answer key.</a:t>
+            </a:r>
+            <a:endParaRPr lang="en-US" sz="1200" dirty="0"/>
+          </a:p>
+        </p:txBody>
+      </p:sp>
+      <p:sp>
+        <p:nvSpPr>
+          <p:cNvPr id="5" name="Text 3"/>
           <p:cNvSpPr/>
           <p:nvPr/>
         </p:nvSpPr>
@@ -2732,7 +5214,7 @@
                 <a:ea typeface="Georgia" pitchFamily="34" charset="-122"/>
                 <a:cs typeface="Georgia" pitchFamily="34" charset="-120"/>
               </a:rPr>
-              <a:t>Settle + chant (5 min)</a:t>
+              <a:t>The flow</a:t>
             </a:r>
             <a:endParaRPr lang="en-US" sz="1800" dirty="0"/>
           </a:p>
@@ -2741,54 +5223,6 @@
       <p:sp>
         <p:nvSpPr>
           <p:cNvPr id="4" name="Text 2"/>
-          <p:cNvSpPr/>
-          <p:nvPr/>
-        </p:nvSpPr>
-        <p:spPr>
-          <a:xfrm>
-            <a:off x="406301" y="870942"/>
-            <a:ext cx="8498026" cy="213271"/>
-          </a:xfrm>
-          <a:prstGeom prst="rect">
-            <a:avLst/>
-          </a:prstGeom>
-          <a:noFill/>
-          <a:ln/>
-        </p:spPr>
-        <p:txBody>
-          <a:bodyPr wrap="square" lIns="0" tIns="0" rIns="0" bIns="0" rtlCol="0" anchor="t"/>
-          <a:lstStyle/>
-          <a:p>
-            <a:pPr algn="l" indent="0" marL="0">
-              <a:lnSpc>
-                <a:spcPts val="1680"/>
-              </a:lnSpc>
-              <a:spcBef>
-                <a:spcPts val="300"/>
-              </a:spcBef>
-              <a:spcAft>
-                <a:spcPts val="300"/>
-              </a:spcAft>
-              <a:buNone/>
-            </a:pPr>
-            <a:r>
-              <a:rPr lang="en-US" sz="1200" dirty="0">
-                <a:solidFill>
-                  <a:srgbClr val="2C2C2C"/>
-                </a:solidFill>
-                <a:latin typeface="Verdana" pitchFamily="34" charset="0"/>
-                <a:ea typeface="Verdana" pitchFamily="34" charset="-122"/>
-                <a:cs typeface="Verdana" pitchFamily="34" charset="-120"/>
-              </a:rPr>
-              <a:t>The Twins chant + lightning round of 10 twins.</a:t>
-            </a:r>
-            <a:endParaRPr lang="en-US" sz="1200" dirty="0"/>
-          </a:p>
-        </p:txBody>
-      </p:sp>
-      <p:sp>
-        <p:nvSpPr>
-          <p:cNvPr id="5" name="Text 3"/>
           <p:cNvSpPr/>
           <p:nvPr/>
         </p:nvSpPr>
@@ -2938,7 +5372,7 @@
                 <a:ea typeface="Georgia" pitchFamily="34" charset="-122"/>
                 <a:cs typeface="Georgia" pitchFamily="34" charset="-120"/>
               </a:rPr>
-              <a:t>Practice (12 min)</a:t>
+              <a:t>Settle + chant (5 min)</a:t>
             </a:r>
             <a:endParaRPr lang="en-US" sz="1800" dirty="0"/>
           </a:p>
@@ -2953,7 +5387,7 @@
         <p:spPr>
           <a:xfrm>
             <a:off x="406301" y="870942"/>
-            <a:ext cx="8498026" cy="464641"/>
+            <a:ext cx="8498026" cy="213271"/>
           </a:xfrm>
           <a:prstGeom prst="rect">
             <a:avLst/>
@@ -2986,283 +5420,7 @@
                 <a:ea typeface="Verdana" pitchFamily="34" charset="-122"/>
                 <a:cs typeface="Verdana" pitchFamily="34" charset="-120"/>
               </a:rPr>
-              <a:t>– Whole class: teacher calls </a:t>
-            </a:r>
-            <a:pPr algn="l" indent="0" marL="0">
-              <a:lnSpc>
-                <a:spcPts val="1680"/>
-              </a:lnSpc>
-              <a:spcBef>
-                <a:spcPts val="300"/>
-              </a:spcBef>
-              <a:spcAft>
-                <a:spcPts val="300"/>
-              </a:spcAft>
-              <a:buNone/>
-            </a:pPr>
-            <a:r>
-              <a:rPr lang="en-US" sz="1200" dirty="0">
-                <a:solidFill>
-                  <a:srgbClr val="2C2C2C"/>
-                </a:solidFill>
-                <a:latin typeface="Verdana" pitchFamily="34" charset="0"/>
-                <a:ea typeface="Verdana" pitchFamily="34" charset="-122"/>
-                <a:cs typeface="Verdana" pitchFamily="34" charset="-120"/>
-              </a:rPr>
-              <a:t>7 × 6</a:t>
-            </a:r>
-            <a:pPr algn="l" indent="0" marL="0">
-              <a:lnSpc>
-                <a:spcPts val="1680"/>
-              </a:lnSpc>
-              <a:spcBef>
-                <a:spcPts val="300"/>
-              </a:spcBef>
-              <a:spcAft>
-                <a:spcPts val="300"/>
-              </a:spcAft>
-              <a:buNone/>
-            </a:pPr>
-            <a:r>
-              <a:rPr lang="en-US" sz="1200" dirty="0">
-                <a:solidFill>
-                  <a:srgbClr val="2C2C2C"/>
-                </a:solidFill>
-                <a:latin typeface="Verdana" pitchFamily="34" charset="0"/>
-                <a:ea typeface="Verdana" pitchFamily="34" charset="-122"/>
-                <a:cs typeface="Verdana" pitchFamily="34" charset="-120"/>
-              </a:rPr>
-              <a:t>. Children put up hands and find the answer (42). – 5 problems chorus: </a:t>
-            </a:r>
-            <a:pPr algn="l" indent="0" marL="0">
-              <a:lnSpc>
-                <a:spcPts val="1680"/>
-              </a:lnSpc>
-              <a:spcBef>
-                <a:spcPts val="300"/>
-              </a:spcBef>
-              <a:spcAft>
-                <a:spcPts val="300"/>
-              </a:spcAft>
-              <a:buNone/>
-            </a:pPr>
-            <a:r>
-              <a:rPr lang="en-US" sz="1200" dirty="0">
-                <a:solidFill>
-                  <a:srgbClr val="2C2C2C"/>
-                </a:solidFill>
-                <a:latin typeface="Verdana" pitchFamily="34" charset="0"/>
-                <a:ea typeface="Verdana" pitchFamily="34" charset="-122"/>
-                <a:cs typeface="Verdana" pitchFamily="34" charset="-120"/>
-              </a:rPr>
-              <a:t>9 × 9</a:t>
-            </a:r>
-            <a:pPr algn="l" indent="0" marL="0">
-              <a:lnSpc>
-                <a:spcPts val="1680"/>
-              </a:lnSpc>
-              <a:spcBef>
-                <a:spcPts val="300"/>
-              </a:spcBef>
-              <a:spcAft>
-                <a:spcPts val="300"/>
-              </a:spcAft>
-              <a:buNone/>
-            </a:pPr>
-            <a:r>
-              <a:rPr lang="en-US" sz="1200" dirty="0">
-                <a:solidFill>
-                  <a:srgbClr val="2C2C2C"/>
-                </a:solidFill>
-                <a:latin typeface="Verdana" pitchFamily="34" charset="0"/>
-                <a:ea typeface="Verdana" pitchFamily="34" charset="-122"/>
-                <a:cs typeface="Verdana" pitchFamily="34" charset="-120"/>
-              </a:rPr>
-              <a:t> (81), </a:t>
-            </a:r>
-            <a:pPr algn="l" indent="0" marL="0">
-              <a:lnSpc>
-                <a:spcPts val="1680"/>
-              </a:lnSpc>
-              <a:spcBef>
-                <a:spcPts val="300"/>
-              </a:spcBef>
-              <a:spcAft>
-                <a:spcPts val="300"/>
-              </a:spcAft>
-              <a:buNone/>
-            </a:pPr>
-            <a:r>
-              <a:rPr lang="en-US" sz="1200" dirty="0">
-                <a:solidFill>
-                  <a:srgbClr val="2C2C2C"/>
-                </a:solidFill>
-                <a:latin typeface="Verdana" pitchFamily="34" charset="0"/>
-                <a:ea typeface="Verdana" pitchFamily="34" charset="-122"/>
-                <a:cs typeface="Verdana" pitchFamily="34" charset="-120"/>
-              </a:rPr>
-              <a:t>6 × 7</a:t>
-            </a:r>
-            <a:pPr algn="l" indent="0" marL="0">
-              <a:lnSpc>
-                <a:spcPts val="1680"/>
-              </a:lnSpc>
-              <a:spcBef>
-                <a:spcPts val="300"/>
-              </a:spcBef>
-              <a:spcAft>
-                <a:spcPts val="300"/>
-              </a:spcAft>
-              <a:buNone/>
-            </a:pPr>
-            <a:r>
-              <a:rPr lang="en-US" sz="1200" dirty="0">
-                <a:solidFill>
-                  <a:srgbClr val="2C2C2C"/>
-                </a:solidFill>
-                <a:latin typeface="Verdana" pitchFamily="34" charset="0"/>
-                <a:ea typeface="Verdana" pitchFamily="34" charset="-122"/>
-                <a:cs typeface="Verdana" pitchFamily="34" charset="-120"/>
-              </a:rPr>
-              <a:t> (42), </a:t>
-            </a:r>
-            <a:pPr algn="l" indent="0" marL="0">
-              <a:lnSpc>
-                <a:spcPts val="1680"/>
-              </a:lnSpc>
-              <a:spcBef>
-                <a:spcPts val="300"/>
-              </a:spcBef>
-              <a:spcAft>
-                <a:spcPts val="300"/>
-              </a:spcAft>
-              <a:buNone/>
-            </a:pPr>
-            <a:r>
-              <a:rPr lang="en-US" sz="1200" dirty="0">
-                <a:solidFill>
-                  <a:srgbClr val="2C2C2C"/>
-                </a:solidFill>
-                <a:latin typeface="Verdana" pitchFamily="34" charset="0"/>
-                <a:ea typeface="Verdana" pitchFamily="34" charset="-122"/>
-                <a:cs typeface="Verdana" pitchFamily="34" charset="-120"/>
-              </a:rPr>
-              <a:t>8 × 8</a:t>
-            </a:r>
-            <a:pPr algn="l" indent="0" marL="0">
-              <a:lnSpc>
-                <a:spcPts val="1680"/>
-              </a:lnSpc>
-              <a:spcBef>
-                <a:spcPts val="300"/>
-              </a:spcBef>
-              <a:spcAft>
-                <a:spcPts val="300"/>
-              </a:spcAft>
-              <a:buNone/>
-            </a:pPr>
-            <a:r>
-              <a:rPr lang="en-US" sz="1200" dirty="0">
-                <a:solidFill>
-                  <a:srgbClr val="2C2C2C"/>
-                </a:solidFill>
-                <a:latin typeface="Verdana" pitchFamily="34" charset="0"/>
-                <a:ea typeface="Verdana" pitchFamily="34" charset="-122"/>
-                <a:cs typeface="Verdana" pitchFamily="34" charset="-120"/>
-              </a:rPr>
-              <a:t> (64), </a:t>
-            </a:r>
-            <a:pPr algn="l" indent="0" marL="0">
-              <a:lnSpc>
-                <a:spcPts val="1680"/>
-              </a:lnSpc>
-              <a:spcBef>
-                <a:spcPts val="300"/>
-              </a:spcBef>
-              <a:spcAft>
-                <a:spcPts val="300"/>
-              </a:spcAft>
-              <a:buNone/>
-            </a:pPr>
-            <a:r>
-              <a:rPr lang="en-US" sz="1200" dirty="0">
-                <a:solidFill>
-                  <a:srgbClr val="2C2C2C"/>
-                </a:solidFill>
-                <a:latin typeface="Verdana" pitchFamily="34" charset="0"/>
-                <a:ea typeface="Verdana" pitchFamily="34" charset="-122"/>
-                <a:cs typeface="Verdana" pitchFamily="34" charset="-120"/>
-              </a:rPr>
-              <a:t>9 × 6</a:t>
-            </a:r>
-            <a:pPr algn="l" indent="0" marL="0">
-              <a:lnSpc>
-                <a:spcPts val="1680"/>
-              </a:lnSpc>
-              <a:spcBef>
-                <a:spcPts val="300"/>
-              </a:spcBef>
-              <a:spcAft>
-                <a:spcPts val="300"/>
-              </a:spcAft>
-              <a:buNone/>
-            </a:pPr>
-            <a:r>
-              <a:rPr lang="en-US" sz="1200" dirty="0">
-                <a:solidFill>
-                  <a:srgbClr val="2C2C2C"/>
-                </a:solidFill>
-                <a:latin typeface="Verdana" pitchFamily="34" charset="0"/>
-                <a:ea typeface="Verdana" pitchFamily="34" charset="-122"/>
-                <a:cs typeface="Verdana" pitchFamily="34" charset="-120"/>
-              </a:rPr>
-              <a:t> (54), </a:t>
-            </a:r>
-            <a:pPr algn="l" indent="0" marL="0">
-              <a:lnSpc>
-                <a:spcPts val="1680"/>
-              </a:lnSpc>
-              <a:spcBef>
-                <a:spcPts val="300"/>
-              </a:spcBef>
-              <a:spcAft>
-                <a:spcPts val="300"/>
-              </a:spcAft>
-              <a:buNone/>
-            </a:pPr>
-            <a:r>
-              <a:rPr lang="en-US" sz="1200" dirty="0">
-                <a:solidFill>
-                  <a:srgbClr val="2C2C2C"/>
-                </a:solidFill>
-                <a:latin typeface="Verdana" pitchFamily="34" charset="0"/>
-                <a:ea typeface="Verdana" pitchFamily="34" charset="-122"/>
-                <a:cs typeface="Verdana" pitchFamily="34" charset="-120"/>
-              </a:rPr>
-              <a:t>7 × 9</a:t>
-            </a:r>
-            <a:pPr algn="l" indent="0" marL="0">
-              <a:lnSpc>
-                <a:spcPts val="1680"/>
-              </a:lnSpc>
-              <a:spcBef>
-                <a:spcPts val="300"/>
-              </a:spcBef>
-              <a:spcAft>
-                <a:spcPts val="300"/>
-              </a:spcAft>
-              <a:buNone/>
-            </a:pPr>
-            <a:r>
-              <a:rPr lang="en-US" sz="1200" dirty="0">
-                <a:solidFill>
-                  <a:srgbClr val="2C2C2C"/>
-                </a:solidFill>
-                <a:latin typeface="Verdana" pitchFamily="34" charset="0"/>
-                <a:ea typeface="Verdana" pitchFamily="34" charset="-122"/>
-                <a:cs typeface="Verdana" pitchFamily="34" charset="-120"/>
-              </a:rPr>
-              <a:t> (63).</a:t>
+              <a:t>The Twins chant + lightning round of 10 twins.</a:t>
             </a:r>
             <a:endParaRPr lang="en-US" sz="1200" dirty="0"/>
           </a:p>
@@ -3271,54 +5429,6 @@
       <p:sp>
         <p:nvSpPr>
           <p:cNvPr id="5" name="Text 3"/>
-          <p:cNvSpPr/>
-          <p:nvPr/>
-        </p:nvSpPr>
-        <p:spPr>
-          <a:xfrm>
-            <a:off x="406301" y="1411784"/>
-            <a:ext cx="8498026" cy="426541"/>
-          </a:xfrm>
-          <a:prstGeom prst="rect">
-            <a:avLst/>
-          </a:prstGeom>
-          <a:noFill/>
-          <a:ln/>
-        </p:spPr>
-        <p:txBody>
-          <a:bodyPr wrap="square" lIns="0" tIns="0" rIns="0" bIns="0" rtlCol="0" anchor="t"/>
-          <a:lstStyle/>
-          <a:p>
-            <a:pPr algn="l" indent="0" marL="0">
-              <a:lnSpc>
-                <a:spcPts val="1680"/>
-              </a:lnSpc>
-              <a:spcBef>
-                <a:spcPts val="300"/>
-              </a:spcBef>
-              <a:spcAft>
-                <a:spcPts val="300"/>
-              </a:spcAft>
-              <a:buNone/>
-            </a:pPr>
-            <a:r>
-              <a:rPr lang="en-US" sz="1200" dirty="0">
-                <a:solidFill>
-                  <a:srgbClr val="2C2C2C"/>
-                </a:solidFill>
-                <a:latin typeface="Verdana" pitchFamily="34" charset="0"/>
-                <a:ea typeface="Verdana" pitchFamily="34" charset="-122"/>
-                <a:cs typeface="Verdana" pitchFamily="34" charset="-120"/>
-              </a:rPr>
-              <a:t>– Pair drill (last 7 min):   – Partner A calls a problem (any from 6×6 to 9×9).   – Partner B answers using the finger trick.   – Swap.</a:t>
-            </a:r>
-            <a:endParaRPr lang="en-US" sz="1200" dirty="0"/>
-          </a:p>
-        </p:txBody>
-      </p:sp>
-      <p:sp>
-        <p:nvSpPr>
-          <p:cNvPr id="6" name="Text 4"/>
           <p:cNvSpPr/>
           <p:nvPr/>
         </p:nvSpPr>
@@ -3468,7 +5578,7 @@
                 <a:ea typeface="Georgia" pitchFamily="34" charset="-122"/>
                 <a:cs typeface="Georgia" pitchFamily="34" charset="-120"/>
               </a:rPr>
-              <a:t>Show + chant (5 min)</a:t>
+              <a:t>Story (8 min) — "The Magic Hand Trick"</a:t>
             </a:r>
             <a:endParaRPr lang="en-US" sz="1800" dirty="0"/>
           </a:p>
@@ -3483,7 +5593,7 @@
         <p:spPr>
           <a:xfrm>
             <a:off x="634901" y="883593"/>
-            <a:ext cx="8102798" cy="281880"/>
+            <a:ext cx="8102798" cy="1500783"/>
           </a:xfrm>
           <a:prstGeom prst="rect">
             <a:avLst/>
@@ -3506,71 +5616,223 @@
               <a:buChar char="•"/>
             </a:pPr>
             <a:r>
-              <a:rPr lang="en-US" sz="1200" dirty="0">
-                <a:solidFill>
-                  <a:srgbClr val="2C2C2C"/>
-                </a:solidFill>
-                <a:latin typeface="Verdana" pitchFamily="34" charset="0"/>
-                <a:ea typeface="Verdana" pitchFamily="34" charset="-122"/>
-                <a:cs typeface="Verdana" pitchFamily="34" charset="-120"/>
-              </a:rPr>
-              <a:t>"Who got 9 × 9 = 81 using their hands?" — hands up.</a:t>
+              <a:rPr lang="en-US" sz="1200" i="1" dirty="0">
+                <a:solidFill>
+                  <a:srgbClr val="2C2C2C"/>
+                </a:solidFill>
+                <a:latin typeface="Verdana" pitchFamily="34" charset="0"/>
+                <a:ea typeface="Verdana" pitchFamily="34" charset="-122"/>
+                <a:cs typeface="Verdana" pitchFamily="34" charset="-120"/>
+              </a:rPr>
+              <a:t>"Today I'll teach you a magic trick. You can multiply 7 × 8 just by counting fingers. Watch."</a:t>
             </a:r>
             <a:endParaRPr lang="en-US" sz="1200" dirty="0"/>
           </a:p>
+          <a:p>
+            <a:pPr algn="l" marL="342900" indent="-342900">
+              <a:lnSpc>
+                <a:spcPts val="1620"/>
+              </a:lnSpc>
+              <a:spcAft>
+                <a:spcPts val="300"/>
+              </a:spcAft>
+              <a:buSzPct val="100000"/>
+              <a:buChar char="•"/>
+            </a:pPr>
+            <a:r>
+              <a:rPr lang="en-US" sz="1200" b="1" dirty="0">
+                <a:solidFill>
+                  <a:srgbClr val="2C2C2C"/>
+                </a:solidFill>
+                <a:latin typeface="Verdana" pitchFamily="34" charset="0"/>
+                <a:ea typeface="Verdana" pitchFamily="34" charset="-122"/>
+                <a:cs typeface="Verdana" pitchFamily="34" charset="-120"/>
+              </a:rPr>
+              <a:t>Demo: 7 × 8.</a:t>
+            </a:r>
+            <a:endParaRPr lang="en-US" sz="1200" dirty="0"/>
+          </a:p>
+          <a:p>
+            <a:pPr algn="l" marL="342900" indent="-342900">
+              <a:lnSpc>
+                <a:spcPts val="1620"/>
+              </a:lnSpc>
+              <a:spcAft>
+                <a:spcPts val="300"/>
+              </a:spcAft>
+              <a:buSzPct val="100000"/>
+              <a:buChar char="•"/>
+            </a:pPr>
+            <a:r>
+              <a:rPr lang="en-US" sz="1200" dirty="0">
+                <a:solidFill>
+                  <a:srgbClr val="2C2C2C"/>
+                </a:solidFill>
+                <a:latin typeface="Verdana" pitchFamily="34" charset="0"/>
+                <a:ea typeface="Verdana" pitchFamily="34" charset="-122"/>
+                <a:cs typeface="Verdana" pitchFamily="34" charset="-120"/>
+              </a:rPr>
+              <a:t>"Hold up both hands. We're going to fold down some fingers."</a:t>
+            </a:r>
+            <a:endParaRPr lang="en-US" sz="1200" dirty="0"/>
+          </a:p>
+          <a:p>
+            <a:pPr algn="l" marL="342900" indent="-342900">
+              <a:lnSpc>
+                <a:spcPts val="1620"/>
+              </a:lnSpc>
+              <a:spcAft>
+                <a:spcPts val="300"/>
+              </a:spcAft>
+              <a:buSzPct val="100000"/>
+              <a:buChar char="•"/>
+            </a:pPr>
+            <a:r>
+              <a:rPr lang="en-US" sz="1200" dirty="0">
+                <a:solidFill>
+                  <a:srgbClr val="2C2C2C"/>
+                </a:solidFill>
+                <a:latin typeface="Verdana" pitchFamily="34" charset="0"/>
+                <a:ea typeface="Verdana" pitchFamily="34" charset="-122"/>
+                <a:cs typeface="Verdana" pitchFamily="34" charset="-120"/>
+              </a:rPr>
+              <a:t>"For 7: fold down (7 − 5) = 2 fingers on the LEFT hand. So 2 down, 3 up on the left."</a:t>
+            </a:r>
+            <a:endParaRPr lang="en-US" sz="1200" dirty="0"/>
+          </a:p>
+          <a:p>
+            <a:pPr algn="l" marL="342900" indent="-342900">
+              <a:lnSpc>
+                <a:spcPts val="1620"/>
+              </a:lnSpc>
+              <a:spcAft>
+                <a:spcPts val="300"/>
+              </a:spcAft>
+              <a:buSzPct val="100000"/>
+              <a:buChar char="•"/>
+            </a:pPr>
+            <a:r>
+              <a:rPr lang="en-US" sz="1200" dirty="0">
+                <a:solidFill>
+                  <a:srgbClr val="2C2C2C"/>
+                </a:solidFill>
+                <a:latin typeface="Verdana" pitchFamily="34" charset="0"/>
+                <a:ea typeface="Verdana" pitchFamily="34" charset="-122"/>
+                <a:cs typeface="Verdana" pitchFamily="34" charset="-120"/>
+              </a:rPr>
+              <a:t>"For 8: fold down (8 − 5) = 3 fingers on the RIGHT hand. So 3 down, 2 up on the right."</a:t>
+            </a:r>
+            <a:endParaRPr lang="en-US" sz="1200" dirty="0"/>
+          </a:p>
+          <a:p>
+            <a:pPr algn="l" marL="342900" indent="-342900">
+              <a:lnSpc>
+                <a:spcPts val="1620"/>
+              </a:lnSpc>
+              <a:spcAft>
+                <a:spcPts val="300"/>
+              </a:spcAft>
+              <a:buSzPct val="100000"/>
+              <a:buChar char="•"/>
+            </a:pPr>
+            <a:r>
+              <a:rPr lang="en-US" sz="1200" dirty="0">
+                <a:solidFill>
+                  <a:srgbClr val="2C2C2C"/>
+                </a:solidFill>
+                <a:latin typeface="Verdana" pitchFamily="34" charset="0"/>
+                <a:ea typeface="Verdana" pitchFamily="34" charset="-122"/>
+                <a:cs typeface="Verdana" pitchFamily="34" charset="-120"/>
+              </a:rPr>
+              <a:t>"Count the fingers DOWN on both hands together: 2 + 3 = </a:t>
+            </a:r>
+            <a:pPr algn="l" indent="0" marL="0">
+              <a:lnSpc>
+                <a:spcPts val="1620"/>
+              </a:lnSpc>
+              <a:spcAft>
+                <a:spcPts val="300"/>
+              </a:spcAft>
+              <a:buNone/>
+            </a:pPr>
+            <a:r>
+              <a:rPr lang="en-US" sz="1200" b="1" dirty="0">
+                <a:solidFill>
+                  <a:srgbClr val="2C2C2C"/>
+                </a:solidFill>
+                <a:latin typeface="Verdana" pitchFamily="34" charset="0"/>
+                <a:ea typeface="Verdana" pitchFamily="34" charset="-122"/>
+                <a:cs typeface="Verdana" pitchFamily="34" charset="-120"/>
+              </a:rPr>
+              <a:t>5</a:t>
+            </a:r>
+            <a:pPr algn="l" indent="0" marL="0">
+              <a:lnSpc>
+                <a:spcPts val="1620"/>
+              </a:lnSpc>
+              <a:spcAft>
+                <a:spcPts val="300"/>
+              </a:spcAft>
+              <a:buNone/>
+            </a:pPr>
+            <a:r>
+              <a:rPr lang="en-US" sz="1200" dirty="0">
+                <a:solidFill>
+                  <a:srgbClr val="2C2C2C"/>
+                </a:solidFill>
+                <a:latin typeface="Verdana" pitchFamily="34" charset="0"/>
+                <a:ea typeface="Verdana" pitchFamily="34" charset="-122"/>
+                <a:cs typeface="Verdana" pitchFamily="34" charset="-120"/>
+              </a:rPr>
+              <a:t>. That's the TENS. → </a:t>
+            </a:r>
+            <a:pPr algn="l" indent="0" marL="0">
+              <a:lnSpc>
+                <a:spcPts val="1620"/>
+              </a:lnSpc>
+              <a:spcAft>
+                <a:spcPts val="300"/>
+              </a:spcAft>
+              <a:buNone/>
+            </a:pPr>
+            <a:r>
+              <a:rPr lang="en-US" sz="1200" b="1" dirty="0">
+                <a:solidFill>
+                  <a:srgbClr val="2C2C2C"/>
+                </a:solidFill>
+                <a:latin typeface="Verdana" pitchFamily="34" charset="0"/>
+                <a:ea typeface="Verdana" pitchFamily="34" charset="-122"/>
+                <a:cs typeface="Verdana" pitchFamily="34" charset="-120"/>
+              </a:rPr>
+              <a:t>50</a:t>
+            </a:r>
+            <a:pPr algn="l" indent="0" marL="0">
+              <a:lnSpc>
+                <a:spcPts val="1620"/>
+              </a:lnSpc>
+              <a:spcAft>
+                <a:spcPts val="300"/>
+              </a:spcAft>
+              <a:buNone/>
+            </a:pPr>
+            <a:r>
+              <a:rPr lang="en-US" sz="1200" dirty="0">
+                <a:solidFill>
+                  <a:srgbClr val="2C2C2C"/>
+                </a:solidFill>
+                <a:latin typeface="Verdana" pitchFamily="34" charset="0"/>
+                <a:ea typeface="Verdana" pitchFamily="34" charset="-122"/>
+                <a:cs typeface="Verdana" pitchFamily="34" charset="-120"/>
+              </a:rPr>
+              <a:t>."</a:t>
+            </a:r>
+            <a:endParaRPr lang="en-US" sz="1200" dirty="0"/>
+          </a:p>
         </p:txBody>
       </p:sp>
       <p:sp>
         <p:nvSpPr>
           <p:cNvPr id="5" name="Text 3"/>
-          <p:cNvSpPr/>
-          <p:nvPr/>
-        </p:nvSpPr>
-        <p:spPr>
-          <a:xfrm>
-            <a:off x="406301" y="1254323"/>
-            <a:ext cx="8498026" cy="213271"/>
-          </a:xfrm>
-          <a:prstGeom prst="rect">
-            <a:avLst/>
-          </a:prstGeom>
-          <a:noFill/>
-          <a:ln/>
-        </p:spPr>
-        <p:txBody>
-          <a:bodyPr wrap="square" lIns="0" tIns="0" rIns="0" bIns="0" rtlCol="0" anchor="t"/>
-          <a:lstStyle/>
-          <a:p>
-            <a:pPr algn="l" indent="0" marL="0">
-              <a:lnSpc>
-                <a:spcPts val="1680"/>
-              </a:lnSpc>
-              <a:spcBef>
-                <a:spcPts val="300"/>
-              </a:spcBef>
-              <a:spcAft>
-                <a:spcPts val="300"/>
-              </a:spcAft>
-              <a:buNone/>
-            </a:pPr>
-            <a:r>
-              <a:rPr lang="en-US" sz="1200" dirty="0">
-                <a:solidFill>
-                  <a:srgbClr val="2C2C2C"/>
-                </a:solidFill>
-                <a:latin typeface="Verdana" pitchFamily="34" charset="0"/>
-                <a:ea typeface="Verdana" pitchFamily="34" charset="-122"/>
-                <a:cs typeface="Verdana" pitchFamily="34" charset="-120"/>
-              </a:rPr>
-              <a:t>– Final chant.</a:t>
-            </a:r>
-            <a:endParaRPr lang="en-US" sz="1200" dirty="0"/>
-          </a:p>
-        </p:txBody>
-      </p:sp>
-      <p:sp>
-        <p:nvSpPr>
-          <p:cNvPr id="6" name="Text 4"/>
           <p:cNvSpPr/>
           <p:nvPr/>
         </p:nvSpPr>
@@ -3720,7 +5982,7 @@
                 <a:ea typeface="Georgia" pitchFamily="34" charset="-122"/>
                 <a:cs typeface="Georgia" pitchFamily="34" charset="-120"/>
               </a:rPr>
-              <a:t>Homework</a:t>
+              <a:t>Story (8 min) — "The Magic Hand Trick" (cont.)</a:t>
             </a:r>
             <a:endParaRPr lang="en-US" sz="1800" dirty="0"/>
           </a:p>
@@ -3734,8 +5996,8 @@
         </p:nvSpPr>
         <p:spPr>
           <a:xfrm>
-            <a:off x="406301" y="870942"/>
-            <a:ext cx="8498026" cy="232321"/>
+            <a:off x="634901" y="883593"/>
+            <a:ext cx="8102798" cy="525661"/>
           </a:xfrm>
           <a:prstGeom prst="rect">
             <a:avLst/>
@@ -3747,74 +6009,170 @@
           <a:bodyPr wrap="square" lIns="0" tIns="0" rIns="0" bIns="0" rtlCol="0" anchor="t"/>
           <a:lstStyle/>
           <a:p>
-            <a:pPr algn="l" indent="0" marL="0">
-              <a:lnSpc>
-                <a:spcPts val="1680"/>
-              </a:lnSpc>
-              <a:spcBef>
-                <a:spcPts val="300"/>
-              </a:spcBef>
-              <a:spcAft>
-                <a:spcPts val="300"/>
-              </a:spcAft>
-              <a:buNone/>
-            </a:pPr>
-            <a:r>
-              <a:rPr lang="en-US" sz="1200" dirty="0">
-                <a:solidFill>
-                  <a:srgbClr val="2C2C2C"/>
-                </a:solidFill>
-                <a:latin typeface="Verdana" pitchFamily="34" charset="0"/>
-                <a:ea typeface="Verdana" pitchFamily="34" charset="-122"/>
-                <a:cs typeface="Verdana" pitchFamily="34" charset="-120"/>
-              </a:rPr>
-              <a:t>– Teach the finger trick to a parent or sibling. Multiply </a:t>
-            </a:r>
-            <a:pPr algn="l" indent="0" marL="0">
-              <a:lnSpc>
-                <a:spcPts val="1680"/>
-              </a:lnSpc>
-              <a:spcBef>
-                <a:spcPts val="300"/>
-              </a:spcBef>
-              <a:spcAft>
-                <a:spcPts val="300"/>
-              </a:spcAft>
-              <a:buNone/>
-            </a:pPr>
-            <a:r>
-              <a:rPr lang="en-US" sz="1200" dirty="0">
-                <a:solidFill>
-                  <a:srgbClr val="2C2C2C"/>
-                </a:solidFill>
-                <a:latin typeface="Verdana" pitchFamily="34" charset="0"/>
-                <a:ea typeface="Verdana" pitchFamily="34" charset="-122"/>
-                <a:cs typeface="Verdana" pitchFamily="34" charset="-120"/>
-              </a:rPr>
-              <a:t>7 × 8</a:t>
-            </a:r>
-            <a:pPr algn="l" indent="0" marL="0">
-              <a:lnSpc>
-                <a:spcPts val="1680"/>
-              </a:lnSpc>
-              <a:spcBef>
-                <a:spcPts val="300"/>
-              </a:spcBef>
-              <a:spcAft>
-                <a:spcPts val="300"/>
-              </a:spcAft>
-              <a:buNone/>
-            </a:pPr>
-            <a:r>
-              <a:rPr lang="en-US" sz="1200" dirty="0">
-                <a:solidFill>
-                  <a:srgbClr val="2C2C2C"/>
-                </a:solidFill>
-                <a:latin typeface="Verdana" pitchFamily="34" charset="0"/>
-                <a:ea typeface="Verdana" pitchFamily="34" charset="-122"/>
-                <a:cs typeface="Verdana" pitchFamily="34" charset="-120"/>
-              </a:rPr>
-              <a:t> together.</a:t>
+            <a:pPr algn="l" marL="342900" indent="-342900">
+              <a:lnSpc>
+                <a:spcPts val="1620"/>
+              </a:lnSpc>
+              <a:spcAft>
+                <a:spcPts val="300"/>
+              </a:spcAft>
+              <a:buSzPct val="100000"/>
+              <a:buChar char="•"/>
+            </a:pPr>
+            <a:r>
+              <a:rPr lang="en-US" sz="1200" dirty="0">
+                <a:solidFill>
+                  <a:srgbClr val="2C2C2C"/>
+                </a:solidFill>
+                <a:latin typeface="Verdana" pitchFamily="34" charset="0"/>
+                <a:ea typeface="Verdana" pitchFamily="34" charset="-122"/>
+                <a:cs typeface="Verdana" pitchFamily="34" charset="-120"/>
+              </a:rPr>
+              <a:t>"Count the fingers UP on left × fingers UP on right: 3 × 2 = </a:t>
+            </a:r>
+            <a:pPr algn="l" indent="0" marL="0">
+              <a:lnSpc>
+                <a:spcPts val="1620"/>
+              </a:lnSpc>
+              <a:spcAft>
+                <a:spcPts val="300"/>
+              </a:spcAft>
+              <a:buNone/>
+            </a:pPr>
+            <a:r>
+              <a:rPr lang="en-US" sz="1200" b="1" dirty="0">
+                <a:solidFill>
+                  <a:srgbClr val="2C2C2C"/>
+                </a:solidFill>
+                <a:latin typeface="Verdana" pitchFamily="34" charset="0"/>
+                <a:ea typeface="Verdana" pitchFamily="34" charset="-122"/>
+                <a:cs typeface="Verdana" pitchFamily="34" charset="-120"/>
+              </a:rPr>
+              <a:t>6</a:t>
+            </a:r>
+            <a:pPr algn="l" indent="0" marL="0">
+              <a:lnSpc>
+                <a:spcPts val="1620"/>
+              </a:lnSpc>
+              <a:spcAft>
+                <a:spcPts val="300"/>
+              </a:spcAft>
+              <a:buNone/>
+            </a:pPr>
+            <a:r>
+              <a:rPr lang="en-US" sz="1200" dirty="0">
+                <a:solidFill>
+                  <a:srgbClr val="2C2C2C"/>
+                </a:solidFill>
+                <a:latin typeface="Verdana" pitchFamily="34" charset="0"/>
+                <a:ea typeface="Verdana" pitchFamily="34" charset="-122"/>
+                <a:cs typeface="Verdana" pitchFamily="34" charset="-120"/>
+              </a:rPr>
+              <a:t>. That's the UNITS. → </a:t>
+            </a:r>
+            <a:pPr algn="l" indent="0" marL="0">
+              <a:lnSpc>
+                <a:spcPts val="1620"/>
+              </a:lnSpc>
+              <a:spcAft>
+                <a:spcPts val="300"/>
+              </a:spcAft>
+              <a:buNone/>
+            </a:pPr>
+            <a:r>
+              <a:rPr lang="en-US" sz="1200" b="1" dirty="0">
+                <a:solidFill>
+                  <a:srgbClr val="2C2C2C"/>
+                </a:solidFill>
+                <a:latin typeface="Verdana" pitchFamily="34" charset="0"/>
+                <a:ea typeface="Verdana" pitchFamily="34" charset="-122"/>
+                <a:cs typeface="Verdana" pitchFamily="34" charset="-120"/>
+              </a:rPr>
+              <a:t>6</a:t>
+            </a:r>
+            <a:pPr algn="l" indent="0" marL="0">
+              <a:lnSpc>
+                <a:spcPts val="1620"/>
+              </a:lnSpc>
+              <a:spcAft>
+                <a:spcPts val="300"/>
+              </a:spcAft>
+              <a:buNone/>
+            </a:pPr>
+            <a:r>
+              <a:rPr lang="en-US" sz="1200" dirty="0">
+                <a:solidFill>
+                  <a:srgbClr val="2C2C2C"/>
+                </a:solidFill>
+                <a:latin typeface="Verdana" pitchFamily="34" charset="0"/>
+                <a:ea typeface="Verdana" pitchFamily="34" charset="-122"/>
+                <a:cs typeface="Verdana" pitchFamily="34" charset="-120"/>
+              </a:rPr>
+              <a:t>."</a:t>
+            </a:r>
+            <a:endParaRPr lang="en-US" sz="1200" dirty="0"/>
+          </a:p>
+          <a:p>
+            <a:pPr algn="l" marL="342900" indent="-342900">
+              <a:lnSpc>
+                <a:spcPts val="1620"/>
+              </a:lnSpc>
+              <a:spcAft>
+                <a:spcPts val="300"/>
+              </a:spcAft>
+              <a:buSzPct val="100000"/>
+              <a:buChar char="•"/>
+            </a:pPr>
+            <a:r>
+              <a:rPr lang="en-US" sz="1200" dirty="0">
+                <a:solidFill>
+                  <a:srgbClr val="2C2C2C"/>
+                </a:solidFill>
+                <a:latin typeface="Verdana" pitchFamily="34" charset="0"/>
+                <a:ea typeface="Verdana" pitchFamily="34" charset="-122"/>
+                <a:cs typeface="Verdana" pitchFamily="34" charset="-120"/>
+              </a:rPr>
+              <a:t>"Total: 50 + 6 = </a:t>
+            </a:r>
+            <a:pPr algn="l" indent="0" marL="0">
+              <a:lnSpc>
+                <a:spcPts val="1620"/>
+              </a:lnSpc>
+              <a:spcAft>
+                <a:spcPts val="300"/>
+              </a:spcAft>
+              <a:buNone/>
+            </a:pPr>
+            <a:r>
+              <a:rPr lang="en-US" sz="1200" b="1" dirty="0">
+                <a:solidFill>
+                  <a:srgbClr val="2C2C2C"/>
+                </a:solidFill>
+                <a:latin typeface="Verdana" pitchFamily="34" charset="0"/>
+                <a:ea typeface="Verdana" pitchFamily="34" charset="-122"/>
+                <a:cs typeface="Verdana" pitchFamily="34" charset="-120"/>
+              </a:rPr>
+              <a:t>56</a:t>
+            </a:r>
+            <a:pPr algn="l" indent="0" marL="0">
+              <a:lnSpc>
+                <a:spcPts val="1620"/>
+              </a:lnSpc>
+              <a:spcAft>
+                <a:spcPts val="300"/>
+              </a:spcAft>
+              <a:buNone/>
+            </a:pPr>
+            <a:r>
+              <a:rPr lang="en-US" sz="1200" dirty="0">
+                <a:solidFill>
+                  <a:srgbClr val="2C2C2C"/>
+                </a:solidFill>
+                <a:latin typeface="Verdana" pitchFamily="34" charset="0"/>
+                <a:ea typeface="Verdana" pitchFamily="34" charset="-122"/>
+                <a:cs typeface="Verdana" pitchFamily="34" charset="-120"/>
+              </a:rPr>
+              <a:t>. ✓"</a:t>
             </a:r>
             <a:endParaRPr lang="en-US" sz="1200" dirty="0"/>
           </a:p>
@@ -3972,7 +6330,7 @@
                 <a:ea typeface="Georgia" pitchFamily="34" charset="-122"/>
                 <a:cs typeface="Georgia" pitchFamily="34" charset="-120"/>
               </a:rPr>
-              <a:t>Differentiation</a:t>
+              <a:t>Story (8 min) — "The Magic Hand Trick" (cont.)</a:t>
             </a:r>
             <a:endParaRPr lang="en-US" sz="1800" dirty="0"/>
           </a:p>
@@ -3987,7 +6345,7 @@
         <p:spPr>
           <a:xfrm>
             <a:off x="634901" y="883593"/>
-            <a:ext cx="8102798" cy="1022747"/>
+            <a:ext cx="8102798" cy="1285577"/>
           </a:xfrm>
           <a:prstGeom prst="rect">
             <a:avLst/>
@@ -4010,115 +6368,55 @@
               <a:buChar char="•"/>
             </a:pPr>
             <a:r>
-              <a:rPr lang="en-US" sz="1200" b="1" dirty="0">
-                <a:solidFill>
-                  <a:srgbClr val="2C2C2C"/>
-                </a:solidFill>
-                <a:latin typeface="Verdana" pitchFamily="34" charset="0"/>
-                <a:ea typeface="Verdana" pitchFamily="34" charset="-122"/>
-                <a:cs typeface="Verdana" pitchFamily="34" charset="-120"/>
-              </a:rPr>
-              <a:t>Tier up:</a:t>
-            </a:r>
-            <a:pPr algn="l" indent="0" marL="0">
-              <a:lnSpc>
-                <a:spcPts val="1620"/>
-              </a:lnSpc>
-              <a:spcAft>
-                <a:spcPts val="300"/>
-              </a:spcAft>
-              <a:buNone/>
-            </a:pPr>
-            <a:r>
-              <a:rPr lang="en-US" sz="1200" dirty="0">
-                <a:solidFill>
-                  <a:srgbClr val="2C2C2C"/>
-                </a:solidFill>
-                <a:latin typeface="Verdana" pitchFamily="34" charset="0"/>
-                <a:ea typeface="Verdana" pitchFamily="34" charset="-122"/>
-                <a:cs typeface="Verdana" pitchFamily="34" charset="-120"/>
-              </a:rPr>
-              <a:t> Try </a:t>
-            </a:r>
-            <a:pPr algn="l" indent="0" marL="0">
-              <a:lnSpc>
-                <a:spcPts val="1620"/>
-              </a:lnSpc>
-              <a:spcAft>
-                <a:spcPts val="300"/>
-              </a:spcAft>
-              <a:buNone/>
-            </a:pPr>
-            <a:r>
-              <a:rPr lang="en-US" sz="1200" dirty="0">
-                <a:solidFill>
-                  <a:srgbClr val="2C2C2C"/>
-                </a:solidFill>
-                <a:latin typeface="Verdana" pitchFamily="34" charset="0"/>
-                <a:ea typeface="Verdana" pitchFamily="34" charset="-122"/>
-                <a:cs typeface="Verdana" pitchFamily="34" charset="-120"/>
-              </a:rPr>
-              <a:t>5 × 6</a:t>
-            </a:r>
-            <a:pPr algn="l" indent="0" marL="0">
-              <a:lnSpc>
-                <a:spcPts val="1620"/>
-              </a:lnSpc>
-              <a:spcAft>
-                <a:spcPts val="300"/>
-              </a:spcAft>
-              <a:buNone/>
-            </a:pPr>
-            <a:r>
-              <a:rPr lang="en-US" sz="1200" dirty="0">
-                <a:solidFill>
-                  <a:srgbClr val="2C2C2C"/>
-                </a:solidFill>
-                <a:latin typeface="Verdana" pitchFamily="34" charset="0"/>
-                <a:ea typeface="Verdana" pitchFamily="34" charset="-122"/>
-                <a:cs typeface="Verdana" pitchFamily="34" charset="-120"/>
-              </a:rPr>
-              <a:t> — what does the trick give? (5: 0 down, 5 up. 6: 1 down, 4 up. Down sum 1 → 10. Up product 5×4 = 20. Total 30. ✓) Notice: works for 5+ too. What about </a:t>
-            </a:r>
-            <a:pPr algn="l" indent="0" marL="0">
-              <a:lnSpc>
-                <a:spcPts val="1620"/>
-              </a:lnSpc>
-              <a:spcAft>
-                <a:spcPts val="300"/>
-              </a:spcAft>
-              <a:buNone/>
-            </a:pPr>
-            <a:r>
-              <a:rPr lang="en-US" sz="1200" dirty="0">
-                <a:solidFill>
-                  <a:srgbClr val="2C2C2C"/>
-                </a:solidFill>
-                <a:latin typeface="Verdana" pitchFamily="34" charset="0"/>
-                <a:ea typeface="Verdana" pitchFamily="34" charset="-122"/>
-                <a:cs typeface="Verdana" pitchFamily="34" charset="-120"/>
-              </a:rPr>
-              <a:t>5 × 5</a:t>
-            </a:r>
-            <a:pPr algn="l" indent="0" marL="0">
-              <a:lnSpc>
-                <a:spcPts val="1620"/>
-              </a:lnSpc>
-              <a:spcAft>
-                <a:spcPts val="300"/>
-              </a:spcAft>
-              <a:buNone/>
-            </a:pPr>
-            <a:r>
-              <a:rPr lang="en-US" sz="1200" dirty="0">
-                <a:solidFill>
-                  <a:srgbClr val="2C2C2C"/>
-                </a:solidFill>
-                <a:latin typeface="Verdana" pitchFamily="34" charset="0"/>
-                <a:ea typeface="Verdana" pitchFamily="34" charset="-122"/>
-                <a:cs typeface="Verdana" pitchFamily="34" charset="-120"/>
-              </a:rPr>
-              <a:t>? (Both 0 down. Down sum 0. Up product 5×5 = 25. ✓ Total 25.) Cool — works for 5 too.</a:t>
+              <a:rPr lang="en-US" sz="1200" dirty="0">
+                <a:solidFill>
+                  <a:srgbClr val="2C2C2C"/>
+                </a:solidFill>
+                <a:latin typeface="Verdana" pitchFamily="34" charset="0"/>
+                <a:ea typeface="Verdana" pitchFamily="34" charset="-122"/>
+                <a:cs typeface="Verdana" pitchFamily="34" charset="-120"/>
+              </a:rPr>
+              <a:t>Repeat for </a:t>
+            </a:r>
+            <a:pPr algn="l" indent="0" marL="0">
+              <a:lnSpc>
+                <a:spcPts val="1620"/>
+              </a:lnSpc>
+              <a:spcAft>
+                <a:spcPts val="300"/>
+              </a:spcAft>
+              <a:buNone/>
+            </a:pPr>
+            <a:r>
+              <a:rPr lang="en-US" sz="1200" dirty="0">
+                <a:solidFill>
+                  <a:srgbClr val="2C2C2C"/>
+                </a:solidFill>
+                <a:latin typeface="Verdana" pitchFamily="34" charset="0"/>
+                <a:ea typeface="Verdana" pitchFamily="34" charset="-122"/>
+                <a:cs typeface="Verdana" pitchFamily="34" charset="-120"/>
+              </a:rPr>
+              <a:t>6 × 9</a:t>
+            </a:r>
+            <a:pPr algn="l" indent="0" marL="0">
+              <a:lnSpc>
+                <a:spcPts val="1620"/>
+              </a:lnSpc>
+              <a:spcAft>
+                <a:spcPts val="300"/>
+              </a:spcAft>
+              <a:buNone/>
+            </a:pPr>
+            <a:r>
+              <a:rPr lang="en-US" sz="1200" dirty="0">
+                <a:solidFill>
+                  <a:srgbClr val="2C2C2C"/>
+                </a:solidFill>
+                <a:latin typeface="Verdana" pitchFamily="34" charset="0"/>
+                <a:ea typeface="Verdana" pitchFamily="34" charset="-122"/>
+                <a:cs typeface="Verdana" pitchFamily="34" charset="-120"/>
+              </a:rPr>
+              <a:t>:</a:t>
             </a:r>
             <a:endParaRPr lang="en-US" sz="1200" dirty="0"/>
           </a:p>
@@ -4134,6 +6432,98 @@
               <a:buChar char="•"/>
             </a:pPr>
             <a:r>
+              <a:rPr lang="en-US" sz="1200" dirty="0">
+                <a:solidFill>
+                  <a:srgbClr val="2C2C2C"/>
+                </a:solidFill>
+                <a:latin typeface="Verdana" pitchFamily="34" charset="0"/>
+                <a:ea typeface="Verdana" pitchFamily="34" charset="-122"/>
+                <a:cs typeface="Verdana" pitchFamily="34" charset="-120"/>
+              </a:rPr>
+              <a:t>6: 1 down, 4 up. 9: 4 down, 1 up.</a:t>
+            </a:r>
+            <a:endParaRPr lang="en-US" sz="1200" dirty="0"/>
+          </a:p>
+          <a:p>
+            <a:pPr algn="l" marL="342900" indent="-342900">
+              <a:lnSpc>
+                <a:spcPts val="1620"/>
+              </a:lnSpc>
+              <a:spcAft>
+                <a:spcPts val="300"/>
+              </a:spcAft>
+              <a:buSzPct val="100000"/>
+              <a:buChar char="•"/>
+            </a:pPr>
+            <a:r>
+              <a:rPr lang="en-US" sz="1200" dirty="0">
+                <a:solidFill>
+                  <a:srgbClr val="2C2C2C"/>
+                </a:solidFill>
+                <a:latin typeface="Verdana" pitchFamily="34" charset="0"/>
+                <a:ea typeface="Verdana" pitchFamily="34" charset="-122"/>
+                <a:cs typeface="Verdana" pitchFamily="34" charset="-120"/>
+              </a:rPr>
+              <a:t>Down sum: 1 + 4 = 5 → 50.</a:t>
+            </a:r>
+            <a:endParaRPr lang="en-US" sz="1200" dirty="0"/>
+          </a:p>
+          <a:p>
+            <a:pPr algn="l" marL="342900" indent="-342900">
+              <a:lnSpc>
+                <a:spcPts val="1620"/>
+              </a:lnSpc>
+              <a:spcAft>
+                <a:spcPts val="300"/>
+              </a:spcAft>
+              <a:buSzPct val="100000"/>
+              <a:buChar char="•"/>
+            </a:pPr>
+            <a:r>
+              <a:rPr lang="en-US" sz="1200" dirty="0">
+                <a:solidFill>
+                  <a:srgbClr val="2C2C2C"/>
+                </a:solidFill>
+                <a:latin typeface="Verdana" pitchFamily="34" charset="0"/>
+                <a:ea typeface="Verdana" pitchFamily="34" charset="-122"/>
+                <a:cs typeface="Verdana" pitchFamily="34" charset="-120"/>
+              </a:rPr>
+              <a:t>Up product: 4 × 1 = 4.</a:t>
+            </a:r>
+            <a:endParaRPr lang="en-US" sz="1200" dirty="0"/>
+          </a:p>
+          <a:p>
+            <a:pPr algn="l" marL="342900" indent="-342900">
+              <a:lnSpc>
+                <a:spcPts val="1620"/>
+              </a:lnSpc>
+              <a:spcAft>
+                <a:spcPts val="300"/>
+              </a:spcAft>
+              <a:buSzPct val="100000"/>
+              <a:buChar char="•"/>
+            </a:pPr>
+            <a:r>
+              <a:rPr lang="en-US" sz="1200" dirty="0">
+                <a:solidFill>
+                  <a:srgbClr val="2C2C2C"/>
+                </a:solidFill>
+                <a:latin typeface="Verdana" pitchFamily="34" charset="0"/>
+                <a:ea typeface="Verdana" pitchFamily="34" charset="-122"/>
+                <a:cs typeface="Verdana" pitchFamily="34" charset="-120"/>
+              </a:rPr>
+              <a:t>Answer: </a:t>
+            </a:r>
+            <a:pPr algn="l" indent="0" marL="0">
+              <a:lnSpc>
+                <a:spcPts val="1620"/>
+              </a:lnSpc>
+              <a:spcAft>
+                <a:spcPts val="300"/>
+              </a:spcAft>
+              <a:buNone/>
+            </a:pPr>
+            <a:r>
               <a:rPr lang="en-US" sz="1200" b="1" dirty="0">
                 <a:solidFill>
                   <a:srgbClr val="2C2C2C"/>
@@ -4142,107 +6532,27 @@
                 <a:ea typeface="Verdana" pitchFamily="34" charset="-122"/>
                 <a:cs typeface="Verdana" pitchFamily="34" charset="-120"/>
               </a:rPr>
-              <a:t>Tier down:</a:t>
-            </a:r>
-            <a:pPr algn="l" indent="0" marL="0">
-              <a:lnSpc>
-                <a:spcPts val="1620"/>
-              </a:lnSpc>
-              <a:spcAft>
-                <a:spcPts val="300"/>
-              </a:spcAft>
-              <a:buNone/>
-            </a:pPr>
-            <a:r>
-              <a:rPr lang="en-US" sz="1200" dirty="0">
-                <a:solidFill>
-                  <a:srgbClr val="2C2C2C"/>
-                </a:solidFill>
-                <a:latin typeface="Verdana" pitchFamily="34" charset="0"/>
-                <a:ea typeface="Verdana" pitchFamily="34" charset="-122"/>
-                <a:cs typeface="Verdana" pitchFamily="34" charset="-120"/>
-              </a:rPr>
-              <a:t> Stay with </a:t>
-            </a:r>
-            <a:pPr algn="l" indent="0" marL="0">
-              <a:lnSpc>
-                <a:spcPts val="1620"/>
-              </a:lnSpc>
-              <a:spcAft>
-                <a:spcPts val="300"/>
-              </a:spcAft>
-              <a:buNone/>
-            </a:pPr>
-            <a:r>
-              <a:rPr lang="en-US" sz="1200" dirty="0">
-                <a:solidFill>
-                  <a:srgbClr val="2C2C2C"/>
-                </a:solidFill>
-                <a:latin typeface="Verdana" pitchFamily="34" charset="0"/>
-                <a:ea typeface="Verdana" pitchFamily="34" charset="-122"/>
-                <a:cs typeface="Verdana" pitchFamily="34" charset="-120"/>
-              </a:rPr>
-              <a:t>7 × 8</a:t>
-            </a:r>
-            <a:pPr algn="l" indent="0" marL="0">
-              <a:lnSpc>
-                <a:spcPts val="1620"/>
-              </a:lnSpc>
-              <a:spcAft>
-                <a:spcPts val="300"/>
-              </a:spcAft>
-              <a:buNone/>
-            </a:pPr>
-            <a:r>
-              <a:rPr lang="en-US" sz="1200" dirty="0">
-                <a:solidFill>
-                  <a:srgbClr val="2C2C2C"/>
-                </a:solidFill>
-                <a:latin typeface="Verdana" pitchFamily="34" charset="0"/>
-                <a:ea typeface="Verdana" pitchFamily="34" charset="-122"/>
-                <a:cs typeface="Verdana" pitchFamily="34" charset="-120"/>
-              </a:rPr>
-              <a:t> and </a:t>
-            </a:r>
-            <a:pPr algn="l" indent="0" marL="0">
-              <a:lnSpc>
-                <a:spcPts val="1620"/>
-              </a:lnSpc>
-              <a:spcAft>
-                <a:spcPts val="300"/>
-              </a:spcAft>
-              <a:buNone/>
-            </a:pPr>
-            <a:r>
-              <a:rPr lang="en-US" sz="1200" dirty="0">
-                <a:solidFill>
-                  <a:srgbClr val="2C2C2C"/>
-                </a:solidFill>
-                <a:latin typeface="Verdana" pitchFamily="34" charset="0"/>
-                <a:ea typeface="Verdana" pitchFamily="34" charset="-122"/>
-                <a:cs typeface="Verdana" pitchFamily="34" charset="-120"/>
-              </a:rPr>
-              <a:t>9 × 9</a:t>
-            </a:r>
-            <a:pPr algn="l" indent="0" marL="0">
-              <a:lnSpc>
-                <a:spcPts val="1620"/>
-              </a:lnSpc>
-              <a:spcAft>
-                <a:spcPts val="300"/>
-              </a:spcAft>
-              <a:buNone/>
-            </a:pPr>
-            <a:r>
-              <a:rPr lang="en-US" sz="1200" dirty="0">
-                <a:solidFill>
-                  <a:srgbClr val="2C2C2C"/>
-                </a:solidFill>
-                <a:latin typeface="Verdana" pitchFamily="34" charset="0"/>
-                <a:ea typeface="Verdana" pitchFamily="34" charset="-122"/>
-                <a:cs typeface="Verdana" pitchFamily="34" charset="-120"/>
-              </a:rPr>
-              <a:t> until comfortable. Don't push variety today.</a:t>
+              <a:t>54</a:t>
+            </a:r>
+            <a:pPr algn="l" indent="0" marL="0">
+              <a:lnSpc>
+                <a:spcPts val="1620"/>
+              </a:lnSpc>
+              <a:spcAft>
+                <a:spcPts val="300"/>
+              </a:spcAft>
+              <a:buNone/>
+            </a:pPr>
+            <a:r>
+              <a:rPr lang="en-US" sz="1200" dirty="0">
+                <a:solidFill>
+                  <a:srgbClr val="2C2C2C"/>
+                </a:solidFill>
+                <a:latin typeface="Verdana" pitchFamily="34" charset="0"/>
+                <a:ea typeface="Verdana" pitchFamily="34" charset="-122"/>
+                <a:cs typeface="Verdana" pitchFamily="34" charset="-120"/>
+              </a:rPr>
+              <a:t>. ✓</a:t>
             </a:r>
             <a:endParaRPr lang="en-US" sz="1200" dirty="0"/>
           </a:p>
@@ -4400,7 +6710,7 @@
                 <a:ea typeface="Georgia" pitchFamily="34" charset="-122"/>
                 <a:cs typeface="Georgia" pitchFamily="34" charset="-120"/>
               </a:rPr>
-              <a:t>Teacher's quick notes</a:t>
+              <a:t>Story (8 min) — "The Magic Hand Trick" (cont.)</a:t>
             </a:r>
             <a:endParaRPr lang="en-US" sz="1800" dirty="0"/>
           </a:p>
@@ -4414,8 +6724,8 @@
         </p:nvSpPr>
         <p:spPr>
           <a:xfrm>
-            <a:off x="406301" y="870942"/>
-            <a:ext cx="8498026" cy="853083"/>
+            <a:off x="634901" y="883593"/>
+            <a:ext cx="8102798" cy="1285577"/>
           </a:xfrm>
           <a:prstGeom prst="rect">
             <a:avLst/>
@@ -4427,120 +6737,202 @@
           <a:bodyPr wrap="square" lIns="0" tIns="0" rIns="0" bIns="0" rtlCol="0" anchor="t"/>
           <a:lstStyle/>
           <a:p>
-            <a:pPr algn="l" indent="0" marL="0">
-              <a:lnSpc>
-                <a:spcPts val="1680"/>
-              </a:lnSpc>
-              <a:spcBef>
-                <a:spcPts val="300"/>
-              </a:spcBef>
-              <a:spcAft>
-                <a:spcPts val="300"/>
-              </a:spcAft>
-              <a:buNone/>
-            </a:pPr>
-            <a:r>
-              <a:rPr lang="en-US" sz="1200" dirty="0">
-                <a:solidFill>
-                  <a:srgbClr val="2C2C2C"/>
-                </a:solidFill>
-                <a:latin typeface="Verdana" pitchFamily="34" charset="0"/>
-                <a:ea typeface="Verdana" pitchFamily="34" charset="-122"/>
-                <a:cs typeface="Verdana" pitchFamily="34" charset="-120"/>
-              </a:rPr>
-              <a:t>– A few children will have trouble keeping track of "down vs up." Slow down with them; the trick </a:t>
-            </a:r>
-            <a:pPr algn="l" indent="0" marL="0">
-              <a:lnSpc>
-                <a:spcPts val="1680"/>
-              </a:lnSpc>
-              <a:spcBef>
-                <a:spcPts val="300"/>
-              </a:spcBef>
-              <a:spcAft>
-                <a:spcPts val="300"/>
-              </a:spcAft>
-              <a:buNone/>
-            </a:pPr>
-            <a:r>
-              <a:rPr lang="en-US" sz="1200" i="1" dirty="0">
-                <a:solidFill>
-                  <a:srgbClr val="2C2C2C"/>
-                </a:solidFill>
-                <a:latin typeface="Verdana" pitchFamily="34" charset="0"/>
-                <a:ea typeface="Verdana" pitchFamily="34" charset="-122"/>
-                <a:cs typeface="Verdana" pitchFamily="34" charset="-120"/>
-              </a:rPr>
-              <a:t>is</a:t>
-            </a:r>
-            <a:pPr algn="l" indent="0" marL="0">
-              <a:lnSpc>
-                <a:spcPts val="1680"/>
-              </a:lnSpc>
-              <a:spcBef>
-                <a:spcPts val="300"/>
-              </a:spcBef>
-              <a:spcAft>
-                <a:spcPts val="300"/>
-              </a:spcAft>
-              <a:buNone/>
-            </a:pPr>
-            <a:r>
-              <a:rPr lang="en-US" sz="1200" dirty="0">
-                <a:solidFill>
-                  <a:srgbClr val="2C2C2C"/>
-                </a:solidFill>
-                <a:latin typeface="Verdana" pitchFamily="34" charset="0"/>
-                <a:ea typeface="Verdana" pitchFamily="34" charset="-122"/>
-                <a:cs typeface="Verdana" pitchFamily="34" charset="-120"/>
-              </a:rPr>
-              <a:t> tricky on the first day. – Some children will object: "I already know my 7 times table." Honest response: </a:t>
-            </a:r>
-            <a:pPr algn="l" indent="0" marL="0">
-              <a:lnSpc>
-                <a:spcPts val="1680"/>
-              </a:lnSpc>
-              <a:spcBef>
-                <a:spcPts val="300"/>
-              </a:spcBef>
-              <a:spcAft>
-                <a:spcPts val="300"/>
-              </a:spcAft>
-              <a:buNone/>
-            </a:pPr>
-            <a:r>
-              <a:rPr lang="en-US" sz="1200" i="1" dirty="0">
-                <a:solidFill>
-                  <a:srgbClr val="2C2C2C"/>
-                </a:solidFill>
-                <a:latin typeface="Verdana" pitchFamily="34" charset="0"/>
-                <a:ea typeface="Verdana" pitchFamily="34" charset="-122"/>
-                <a:cs typeface="Verdana" pitchFamily="34" charset="-120"/>
-              </a:rPr>
-              <a:t>"Great! Now you have TWO ways of finding the answer."</a:t>
-            </a:r>
-            <a:pPr algn="l" indent="0" marL="0">
-              <a:lnSpc>
-                <a:spcPts val="1680"/>
-              </a:lnSpc>
-              <a:spcBef>
-                <a:spcPts val="300"/>
-              </a:spcBef>
-              <a:spcAft>
-                <a:spcPts val="300"/>
-              </a:spcAft>
-              <a:buNone/>
-            </a:pPr>
-            <a:r>
-              <a:rPr lang="en-US" sz="1200" dirty="0">
-                <a:solidFill>
-                  <a:srgbClr val="2C2C2C"/>
-                </a:solidFill>
-                <a:latin typeface="Verdana" pitchFamily="34" charset="0"/>
-                <a:ea typeface="Verdana" pitchFamily="34" charset="-122"/>
-                <a:cs typeface="Verdana" pitchFamily="34" charset="-120"/>
-              </a:rPr>
-              <a:t> – Don't explain why it works today. Day 4 is the dot-drawing day.</a:t>
+            <a:pPr algn="l" marL="342900" indent="-342900">
+              <a:lnSpc>
+                <a:spcPts val="1620"/>
+              </a:lnSpc>
+              <a:spcAft>
+                <a:spcPts val="300"/>
+              </a:spcAft>
+              <a:buSzPct val="100000"/>
+              <a:buChar char="•"/>
+            </a:pPr>
+            <a:r>
+              <a:rPr lang="en-US" sz="1200" dirty="0">
+                <a:solidFill>
+                  <a:srgbClr val="2C2C2C"/>
+                </a:solidFill>
+                <a:latin typeface="Verdana" pitchFamily="34" charset="0"/>
+                <a:ea typeface="Verdana" pitchFamily="34" charset="-122"/>
+                <a:cs typeface="Verdana" pitchFamily="34" charset="-120"/>
+              </a:rPr>
+              <a:t>Repeat for </a:t>
+            </a:r>
+            <a:pPr algn="l" indent="0" marL="0">
+              <a:lnSpc>
+                <a:spcPts val="1620"/>
+              </a:lnSpc>
+              <a:spcAft>
+                <a:spcPts val="300"/>
+              </a:spcAft>
+              <a:buNone/>
+            </a:pPr>
+            <a:r>
+              <a:rPr lang="en-US" sz="1200" dirty="0">
+                <a:solidFill>
+                  <a:srgbClr val="2C2C2C"/>
+                </a:solidFill>
+                <a:latin typeface="Verdana" pitchFamily="34" charset="0"/>
+                <a:ea typeface="Verdana" pitchFamily="34" charset="-122"/>
+                <a:cs typeface="Verdana" pitchFamily="34" charset="-120"/>
+              </a:rPr>
+              <a:t>8 × 9</a:t>
+            </a:r>
+            <a:pPr algn="l" indent="0" marL="0">
+              <a:lnSpc>
+                <a:spcPts val="1620"/>
+              </a:lnSpc>
+              <a:spcAft>
+                <a:spcPts val="300"/>
+              </a:spcAft>
+              <a:buNone/>
+            </a:pPr>
+            <a:r>
+              <a:rPr lang="en-US" sz="1200" dirty="0">
+                <a:solidFill>
+                  <a:srgbClr val="2C2C2C"/>
+                </a:solidFill>
+                <a:latin typeface="Verdana" pitchFamily="34" charset="0"/>
+                <a:ea typeface="Verdana" pitchFamily="34" charset="-122"/>
+                <a:cs typeface="Verdana" pitchFamily="34" charset="-120"/>
+              </a:rPr>
+              <a:t>:</a:t>
+            </a:r>
+            <a:endParaRPr lang="en-US" sz="1200" dirty="0"/>
+          </a:p>
+          <a:p>
+            <a:pPr algn="l" marL="342900" indent="-342900">
+              <a:lnSpc>
+                <a:spcPts val="1620"/>
+              </a:lnSpc>
+              <a:spcAft>
+                <a:spcPts val="300"/>
+              </a:spcAft>
+              <a:buSzPct val="100000"/>
+              <a:buChar char="•"/>
+            </a:pPr>
+            <a:r>
+              <a:rPr lang="en-US" sz="1200" dirty="0">
+                <a:solidFill>
+                  <a:srgbClr val="2C2C2C"/>
+                </a:solidFill>
+                <a:latin typeface="Verdana" pitchFamily="34" charset="0"/>
+                <a:ea typeface="Verdana" pitchFamily="34" charset="-122"/>
+                <a:cs typeface="Verdana" pitchFamily="34" charset="-120"/>
+              </a:rPr>
+              <a:t>8: 3 down, 2 up. 9: 4 down, 1 up.</a:t>
+            </a:r>
+            <a:endParaRPr lang="en-US" sz="1200" dirty="0"/>
+          </a:p>
+          <a:p>
+            <a:pPr algn="l" marL="342900" indent="-342900">
+              <a:lnSpc>
+                <a:spcPts val="1620"/>
+              </a:lnSpc>
+              <a:spcAft>
+                <a:spcPts val="300"/>
+              </a:spcAft>
+              <a:buSzPct val="100000"/>
+              <a:buChar char="•"/>
+            </a:pPr>
+            <a:r>
+              <a:rPr lang="en-US" sz="1200" dirty="0">
+                <a:solidFill>
+                  <a:srgbClr val="2C2C2C"/>
+                </a:solidFill>
+                <a:latin typeface="Verdana" pitchFamily="34" charset="0"/>
+                <a:ea typeface="Verdana" pitchFamily="34" charset="-122"/>
+                <a:cs typeface="Verdana" pitchFamily="34" charset="-120"/>
+              </a:rPr>
+              <a:t>Down sum: 3 + 4 = 7 → 70.</a:t>
+            </a:r>
+            <a:endParaRPr lang="en-US" sz="1200" dirty="0"/>
+          </a:p>
+          <a:p>
+            <a:pPr algn="l" marL="342900" indent="-342900">
+              <a:lnSpc>
+                <a:spcPts val="1620"/>
+              </a:lnSpc>
+              <a:spcAft>
+                <a:spcPts val="300"/>
+              </a:spcAft>
+              <a:buSzPct val="100000"/>
+              <a:buChar char="•"/>
+            </a:pPr>
+            <a:r>
+              <a:rPr lang="en-US" sz="1200" dirty="0">
+                <a:solidFill>
+                  <a:srgbClr val="2C2C2C"/>
+                </a:solidFill>
+                <a:latin typeface="Verdana" pitchFamily="34" charset="0"/>
+                <a:ea typeface="Verdana" pitchFamily="34" charset="-122"/>
+                <a:cs typeface="Verdana" pitchFamily="34" charset="-120"/>
+              </a:rPr>
+              <a:t>Up product: 2 × 1 = 2.</a:t>
+            </a:r>
+            <a:endParaRPr lang="en-US" sz="1200" dirty="0"/>
+          </a:p>
+          <a:p>
+            <a:pPr algn="l" marL="342900" indent="-342900">
+              <a:lnSpc>
+                <a:spcPts val="1620"/>
+              </a:lnSpc>
+              <a:spcAft>
+                <a:spcPts val="300"/>
+              </a:spcAft>
+              <a:buSzPct val="100000"/>
+              <a:buChar char="•"/>
+            </a:pPr>
+            <a:r>
+              <a:rPr lang="en-US" sz="1200" dirty="0">
+                <a:solidFill>
+                  <a:srgbClr val="2C2C2C"/>
+                </a:solidFill>
+                <a:latin typeface="Verdana" pitchFamily="34" charset="0"/>
+                <a:ea typeface="Verdana" pitchFamily="34" charset="-122"/>
+                <a:cs typeface="Verdana" pitchFamily="34" charset="-120"/>
+              </a:rPr>
+              <a:t>Answer: </a:t>
+            </a:r>
+            <a:pPr algn="l" indent="0" marL="0">
+              <a:lnSpc>
+                <a:spcPts val="1620"/>
+              </a:lnSpc>
+              <a:spcAft>
+                <a:spcPts val="300"/>
+              </a:spcAft>
+              <a:buNone/>
+            </a:pPr>
+            <a:r>
+              <a:rPr lang="en-US" sz="1200" b="1" dirty="0">
+                <a:solidFill>
+                  <a:srgbClr val="2C2C2C"/>
+                </a:solidFill>
+                <a:latin typeface="Verdana" pitchFamily="34" charset="0"/>
+                <a:ea typeface="Verdana" pitchFamily="34" charset="-122"/>
+                <a:cs typeface="Verdana" pitchFamily="34" charset="-120"/>
+              </a:rPr>
+              <a:t>72</a:t>
+            </a:r>
+            <a:pPr algn="l" indent="0" marL="0">
+              <a:lnSpc>
+                <a:spcPts val="1620"/>
+              </a:lnSpc>
+              <a:spcAft>
+                <a:spcPts val="300"/>
+              </a:spcAft>
+              <a:buNone/>
+            </a:pPr>
+            <a:r>
+              <a:rPr lang="en-US" sz="1200" dirty="0">
+                <a:solidFill>
+                  <a:srgbClr val="2C2C2C"/>
+                </a:solidFill>
+                <a:latin typeface="Verdana" pitchFamily="34" charset="0"/>
+                <a:ea typeface="Verdana" pitchFamily="34" charset="-122"/>
+                <a:cs typeface="Verdana" pitchFamily="34" charset="-120"/>
+              </a:rPr>
+              <a:t>. ✓</a:t>
             </a:r>
             <a:endParaRPr lang="en-US" sz="1200" dirty="0"/>
           </a:p>
